--- a/prompt_engineering/pe-1-basics-v2.pptx
+++ b/prompt_engineering/pe-1-basics-v2.pptx
@@ -4,8 +4,11 @@
   <p:sldMasterIdLst>
     <p:sldMasterId id="2147483648" r:id="rId1"/>
   </p:sldMasterIdLst>
+  <p:notesMasterIdLst>
+    <p:notesMasterId r:id="rId32"/>
+  </p:notesMasterIdLst>
   <p:handoutMasterIdLst>
-    <p:handoutMasterId r:id="rId29"/>
+    <p:handoutMasterId r:id="rId33"/>
   </p:handoutMasterIdLst>
   <p:sldIdLst>
     <p:sldId id="260" r:id="rId2"/>
@@ -20,21 +23,24 @@
     <p:sldId id="267" r:id="rId11"/>
     <p:sldId id="275" r:id="rId12"/>
     <p:sldId id="268" r:id="rId13"/>
-    <p:sldId id="276" r:id="rId14"/>
-    <p:sldId id="277" r:id="rId15"/>
-    <p:sldId id="274" r:id="rId16"/>
-    <p:sldId id="278" r:id="rId17"/>
-    <p:sldId id="279" r:id="rId18"/>
-    <p:sldId id="269" r:id="rId19"/>
-    <p:sldId id="281" r:id="rId20"/>
-    <p:sldId id="280" r:id="rId21"/>
-    <p:sldId id="270" r:id="rId22"/>
-    <p:sldId id="271" r:id="rId23"/>
-    <p:sldId id="285" r:id="rId24"/>
-    <p:sldId id="282" r:id="rId25"/>
-    <p:sldId id="272" r:id="rId26"/>
-    <p:sldId id="273" r:id="rId27"/>
-    <p:sldId id="264" r:id="rId28"/>
+    <p:sldId id="286" r:id="rId14"/>
+    <p:sldId id="276" r:id="rId15"/>
+    <p:sldId id="277" r:id="rId16"/>
+    <p:sldId id="274" r:id="rId17"/>
+    <p:sldId id="278" r:id="rId18"/>
+    <p:sldId id="279" r:id="rId19"/>
+    <p:sldId id="269" r:id="rId20"/>
+    <p:sldId id="281" r:id="rId21"/>
+    <p:sldId id="280" r:id="rId22"/>
+    <p:sldId id="270" r:id="rId23"/>
+    <p:sldId id="271" r:id="rId24"/>
+    <p:sldId id="287" r:id="rId25"/>
+    <p:sldId id="288" r:id="rId26"/>
+    <p:sldId id="285" r:id="rId27"/>
+    <p:sldId id="282" r:id="rId28"/>
+    <p:sldId id="272" r:id="rId29"/>
+    <p:sldId id="273" r:id="rId30"/>
+    <p:sldId id="264" r:id="rId31"/>
   </p:sldIdLst>
   <p:sldSz cx="12192000" cy="6858000"/>
   <p:notesSz cx="6858000" cy="9144000"/>
@@ -238,7 +244,7 @@
           <a:p>
             <a:fld id="{7BAEECA8-D063-486F-AE31-5020270C1449}" type="datetimeFigureOut">
               <a:rPr lang="en-US" smtClean="0"/>
-              <a:t>5/8/2026</a:t>
+              <a:t>5/25/2026</a:t>
             </a:fld>
             <a:endParaRPr lang="en-US"/>
           </a:p>
@@ -331,6 +337,656 @@
   </p:cSld>
   <p:clrMap bg1="lt1" tx1="dk1" bg2="lt2" tx2="dk2" accent1="accent1" accent2="accent2" accent3="accent3" accent4="accent4" accent5="accent5" accent6="accent6" hlink="hlink" folHlink="folHlink"/>
 </p:handoutMaster>
+</file>
+
+<file path=ppt/notesMasters/notesMaster1.xml><?xml version="1.0" encoding="utf-8"?>
+<p:notesMaster xmlns:a="http://schemas.openxmlformats.org/drawingml/2006/main" xmlns:r="http://schemas.openxmlformats.org/officeDocument/2006/relationships" xmlns:p="http://schemas.openxmlformats.org/presentationml/2006/main">
+  <p:cSld>
+    <p:bg>
+      <p:bgRef idx="1001">
+        <a:schemeClr val="bg1"/>
+      </p:bgRef>
+    </p:bg>
+    <p:spTree>
+      <p:nvGrpSpPr>
+        <p:cNvPr id="1" name=""/>
+        <p:cNvGrpSpPr/>
+        <p:nvPr/>
+      </p:nvGrpSpPr>
+      <p:grpSpPr>
+        <a:xfrm>
+          <a:off x="0" y="0"/>
+          <a:ext cx="0" cy="0"/>
+          <a:chOff x="0" y="0"/>
+          <a:chExt cx="0" cy="0"/>
+        </a:xfrm>
+      </p:grpSpPr>
+      <p:sp>
+        <p:nvSpPr>
+          <p:cNvPr id="2" name="Header Placeholder 1"/>
+          <p:cNvSpPr>
+            <a:spLocks noGrp="1"/>
+          </p:cNvSpPr>
+          <p:nvPr>
+            <p:ph type="hdr" sz="quarter"/>
+          </p:nvPr>
+        </p:nvSpPr>
+        <p:spPr>
+          <a:xfrm>
+            <a:off x="0" y="0"/>
+            <a:ext cx="2971800" cy="458788"/>
+          </a:xfrm>
+          <a:prstGeom prst="rect">
+            <a:avLst/>
+          </a:prstGeom>
+        </p:spPr>
+        <p:txBody>
+          <a:bodyPr vert="horz" lIns="91440" tIns="45720" rIns="91440" bIns="45720" rtlCol="0"/>
+          <a:lstStyle>
+            <a:lvl1pPr algn="l">
+              <a:defRPr sz="1200"/>
+            </a:lvl1pPr>
+          </a:lstStyle>
+          <a:p>
+            <a:endParaRPr lang="en-IN"/>
+          </a:p>
+        </p:txBody>
+      </p:sp>
+      <p:sp>
+        <p:nvSpPr>
+          <p:cNvPr id="3" name="Date Placeholder 2"/>
+          <p:cNvSpPr>
+            <a:spLocks noGrp="1"/>
+          </p:cNvSpPr>
+          <p:nvPr>
+            <p:ph type="dt" idx="1"/>
+          </p:nvPr>
+        </p:nvSpPr>
+        <p:spPr>
+          <a:xfrm>
+            <a:off x="3884613" y="0"/>
+            <a:ext cx="2971800" cy="458788"/>
+          </a:xfrm>
+          <a:prstGeom prst="rect">
+            <a:avLst/>
+          </a:prstGeom>
+        </p:spPr>
+        <p:txBody>
+          <a:bodyPr vert="horz" lIns="91440" tIns="45720" rIns="91440" bIns="45720" rtlCol="0"/>
+          <a:lstStyle>
+            <a:lvl1pPr algn="r">
+              <a:defRPr sz="1200"/>
+            </a:lvl1pPr>
+          </a:lstStyle>
+          <a:p>
+            <a:fld id="{073EEAA7-AFB7-4D13-AC6E-D387B4394DA4}" type="datetimeFigureOut">
+              <a:rPr lang="en-IN" smtClean="0"/>
+              <a:t>25-05-2026</a:t>
+            </a:fld>
+            <a:endParaRPr lang="en-IN"/>
+          </a:p>
+        </p:txBody>
+      </p:sp>
+      <p:sp>
+        <p:nvSpPr>
+          <p:cNvPr id="4" name="Slide Image Placeholder 3"/>
+          <p:cNvSpPr>
+            <a:spLocks noGrp="1" noRot="1" noChangeAspect="1"/>
+          </p:cNvSpPr>
+          <p:nvPr>
+            <p:ph type="sldImg" idx="2"/>
+          </p:nvPr>
+        </p:nvSpPr>
+        <p:spPr>
+          <a:xfrm>
+            <a:off x="685800" y="1143000"/>
+            <a:ext cx="5486400" cy="3086100"/>
+          </a:xfrm>
+          <a:prstGeom prst="rect">
+            <a:avLst/>
+          </a:prstGeom>
+          <a:noFill/>
+          <a:ln w="12700">
+            <a:solidFill>
+              <a:prstClr val="black"/>
+            </a:solidFill>
+          </a:ln>
+        </p:spPr>
+        <p:txBody>
+          <a:bodyPr vert="horz" lIns="91440" tIns="45720" rIns="91440" bIns="45720" rtlCol="0" anchor="ctr"/>
+          <a:lstStyle/>
+          <a:p>
+            <a:endParaRPr lang="en-IN"/>
+          </a:p>
+        </p:txBody>
+      </p:sp>
+      <p:sp>
+        <p:nvSpPr>
+          <p:cNvPr id="5" name="Notes Placeholder 4"/>
+          <p:cNvSpPr>
+            <a:spLocks noGrp="1"/>
+          </p:cNvSpPr>
+          <p:nvPr>
+            <p:ph type="body" sz="quarter" idx="3"/>
+          </p:nvPr>
+        </p:nvSpPr>
+        <p:spPr>
+          <a:xfrm>
+            <a:off x="685800" y="4400550"/>
+            <a:ext cx="5486400" cy="3600450"/>
+          </a:xfrm>
+          <a:prstGeom prst="rect">
+            <a:avLst/>
+          </a:prstGeom>
+        </p:spPr>
+        <p:txBody>
+          <a:bodyPr vert="horz" lIns="91440" tIns="45720" rIns="91440" bIns="45720" rtlCol="0"/>
+          <a:lstStyle/>
+          <a:p>
+            <a:pPr lvl="0"/>
+            <a:r>
+              <a:rPr lang="en-US"/>
+              <a:t>Click to edit Master text styles</a:t>
+            </a:r>
+          </a:p>
+          <a:p>
+            <a:pPr lvl="1"/>
+            <a:r>
+              <a:rPr lang="en-US"/>
+              <a:t>Second level</a:t>
+            </a:r>
+          </a:p>
+          <a:p>
+            <a:pPr lvl="2"/>
+            <a:r>
+              <a:rPr lang="en-US"/>
+              <a:t>Third level</a:t>
+            </a:r>
+          </a:p>
+          <a:p>
+            <a:pPr lvl="3"/>
+            <a:r>
+              <a:rPr lang="en-US"/>
+              <a:t>Fourth level</a:t>
+            </a:r>
+          </a:p>
+          <a:p>
+            <a:pPr lvl="4"/>
+            <a:r>
+              <a:rPr lang="en-US"/>
+              <a:t>Fifth level</a:t>
+            </a:r>
+            <a:endParaRPr lang="en-IN"/>
+          </a:p>
+        </p:txBody>
+      </p:sp>
+      <p:sp>
+        <p:nvSpPr>
+          <p:cNvPr id="6" name="Footer Placeholder 5"/>
+          <p:cNvSpPr>
+            <a:spLocks noGrp="1"/>
+          </p:cNvSpPr>
+          <p:nvPr>
+            <p:ph type="ftr" sz="quarter" idx="4"/>
+          </p:nvPr>
+        </p:nvSpPr>
+        <p:spPr>
+          <a:xfrm>
+            <a:off x="0" y="8685213"/>
+            <a:ext cx="2971800" cy="458787"/>
+          </a:xfrm>
+          <a:prstGeom prst="rect">
+            <a:avLst/>
+          </a:prstGeom>
+        </p:spPr>
+        <p:txBody>
+          <a:bodyPr vert="horz" lIns="91440" tIns="45720" rIns="91440" bIns="45720" rtlCol="0" anchor="b"/>
+          <a:lstStyle>
+            <a:lvl1pPr algn="l">
+              <a:defRPr sz="1200"/>
+            </a:lvl1pPr>
+          </a:lstStyle>
+          <a:p>
+            <a:endParaRPr lang="en-IN"/>
+          </a:p>
+        </p:txBody>
+      </p:sp>
+      <p:sp>
+        <p:nvSpPr>
+          <p:cNvPr id="7" name="Slide Number Placeholder 6"/>
+          <p:cNvSpPr>
+            <a:spLocks noGrp="1"/>
+          </p:cNvSpPr>
+          <p:nvPr>
+            <p:ph type="sldNum" sz="quarter" idx="5"/>
+          </p:nvPr>
+        </p:nvSpPr>
+        <p:spPr>
+          <a:xfrm>
+            <a:off x="3884613" y="8685213"/>
+            <a:ext cx="2971800" cy="458787"/>
+          </a:xfrm>
+          <a:prstGeom prst="rect">
+            <a:avLst/>
+          </a:prstGeom>
+        </p:spPr>
+        <p:txBody>
+          <a:bodyPr vert="horz" lIns="91440" tIns="45720" rIns="91440" bIns="45720" rtlCol="0" anchor="b"/>
+          <a:lstStyle>
+            <a:lvl1pPr algn="r">
+              <a:defRPr sz="1200"/>
+            </a:lvl1pPr>
+          </a:lstStyle>
+          <a:p>
+            <a:fld id="{BE7BD907-10E1-4554-8631-1965B6043C47}" type="slidenum">
+              <a:rPr lang="en-IN" smtClean="0"/>
+              <a:t>‹#›</a:t>
+            </a:fld>
+            <a:endParaRPr lang="en-IN"/>
+          </a:p>
+        </p:txBody>
+      </p:sp>
+    </p:spTree>
+    <p:extLst>
+      <p:ext uri="{BB962C8B-B14F-4D97-AF65-F5344CB8AC3E}">
+        <p14:creationId xmlns:p14="http://schemas.microsoft.com/office/powerpoint/2010/main" val="251623159"/>
+      </p:ext>
+    </p:extLst>
+  </p:cSld>
+  <p:clrMap bg1="lt1" tx1="dk1" bg2="lt2" tx2="dk2" accent1="accent1" accent2="accent2" accent3="accent3" accent4="accent4" accent5="accent5" accent6="accent6" hlink="hlink" folHlink="folHlink"/>
+  <p:notesStyle>
+    <a:lvl1pPr marL="0" algn="l" defTabSz="914400" rtl="0" eaLnBrk="1" latinLnBrk="0" hangingPunct="1">
+      <a:defRPr sz="1200" kern="1200">
+        <a:solidFill>
+          <a:schemeClr val="tx1"/>
+        </a:solidFill>
+        <a:latin typeface="+mn-lt"/>
+        <a:ea typeface="+mn-ea"/>
+        <a:cs typeface="+mn-cs"/>
+      </a:defRPr>
+    </a:lvl1pPr>
+    <a:lvl2pPr marL="457200" algn="l" defTabSz="914400" rtl="0" eaLnBrk="1" latinLnBrk="0" hangingPunct="1">
+      <a:defRPr sz="1200" kern="1200">
+        <a:solidFill>
+          <a:schemeClr val="tx1"/>
+        </a:solidFill>
+        <a:latin typeface="+mn-lt"/>
+        <a:ea typeface="+mn-ea"/>
+        <a:cs typeface="+mn-cs"/>
+      </a:defRPr>
+    </a:lvl2pPr>
+    <a:lvl3pPr marL="914400" algn="l" defTabSz="914400" rtl="0" eaLnBrk="1" latinLnBrk="0" hangingPunct="1">
+      <a:defRPr sz="1200" kern="1200">
+        <a:solidFill>
+          <a:schemeClr val="tx1"/>
+        </a:solidFill>
+        <a:latin typeface="+mn-lt"/>
+        <a:ea typeface="+mn-ea"/>
+        <a:cs typeface="+mn-cs"/>
+      </a:defRPr>
+    </a:lvl3pPr>
+    <a:lvl4pPr marL="1371600" algn="l" defTabSz="914400" rtl="0" eaLnBrk="1" latinLnBrk="0" hangingPunct="1">
+      <a:defRPr sz="1200" kern="1200">
+        <a:solidFill>
+          <a:schemeClr val="tx1"/>
+        </a:solidFill>
+        <a:latin typeface="+mn-lt"/>
+        <a:ea typeface="+mn-ea"/>
+        <a:cs typeface="+mn-cs"/>
+      </a:defRPr>
+    </a:lvl4pPr>
+    <a:lvl5pPr marL="1828800" algn="l" defTabSz="914400" rtl="0" eaLnBrk="1" latinLnBrk="0" hangingPunct="1">
+      <a:defRPr sz="1200" kern="1200">
+        <a:solidFill>
+          <a:schemeClr val="tx1"/>
+        </a:solidFill>
+        <a:latin typeface="+mn-lt"/>
+        <a:ea typeface="+mn-ea"/>
+        <a:cs typeface="+mn-cs"/>
+      </a:defRPr>
+    </a:lvl5pPr>
+    <a:lvl6pPr marL="2286000" algn="l" defTabSz="914400" rtl="0" eaLnBrk="1" latinLnBrk="0" hangingPunct="1">
+      <a:defRPr sz="1200" kern="1200">
+        <a:solidFill>
+          <a:schemeClr val="tx1"/>
+        </a:solidFill>
+        <a:latin typeface="+mn-lt"/>
+        <a:ea typeface="+mn-ea"/>
+        <a:cs typeface="+mn-cs"/>
+      </a:defRPr>
+    </a:lvl6pPr>
+    <a:lvl7pPr marL="2743200" algn="l" defTabSz="914400" rtl="0" eaLnBrk="1" latinLnBrk="0" hangingPunct="1">
+      <a:defRPr sz="1200" kern="1200">
+        <a:solidFill>
+          <a:schemeClr val="tx1"/>
+        </a:solidFill>
+        <a:latin typeface="+mn-lt"/>
+        <a:ea typeface="+mn-ea"/>
+        <a:cs typeface="+mn-cs"/>
+      </a:defRPr>
+    </a:lvl7pPr>
+    <a:lvl8pPr marL="3200400" algn="l" defTabSz="914400" rtl="0" eaLnBrk="1" latinLnBrk="0" hangingPunct="1">
+      <a:defRPr sz="1200" kern="1200">
+        <a:solidFill>
+          <a:schemeClr val="tx1"/>
+        </a:solidFill>
+        <a:latin typeface="+mn-lt"/>
+        <a:ea typeface="+mn-ea"/>
+        <a:cs typeface="+mn-cs"/>
+      </a:defRPr>
+    </a:lvl8pPr>
+    <a:lvl9pPr marL="3657600" algn="l" defTabSz="914400" rtl="0" eaLnBrk="1" latinLnBrk="0" hangingPunct="1">
+      <a:defRPr sz="1200" kern="1200">
+        <a:solidFill>
+          <a:schemeClr val="tx1"/>
+        </a:solidFill>
+        <a:latin typeface="+mn-lt"/>
+        <a:ea typeface="+mn-ea"/>
+        <a:cs typeface="+mn-cs"/>
+      </a:defRPr>
+    </a:lvl9pPr>
+  </p:notesStyle>
+</p:notesMaster>
+</file>
+
+<file path=ppt/notesSlides/notesSlide1.xml><?xml version="1.0" encoding="utf-8"?>
+<p:notes xmlns:a="http://schemas.openxmlformats.org/drawingml/2006/main" xmlns:r="http://schemas.openxmlformats.org/officeDocument/2006/relationships" xmlns:p="http://schemas.openxmlformats.org/presentationml/2006/main">
+  <p:cSld>
+    <p:spTree>
+      <p:nvGrpSpPr>
+        <p:cNvPr id="1" name=""/>
+        <p:cNvGrpSpPr/>
+        <p:nvPr/>
+      </p:nvGrpSpPr>
+      <p:grpSpPr>
+        <a:xfrm>
+          <a:off x="0" y="0"/>
+          <a:ext cx="0" cy="0"/>
+          <a:chOff x="0" y="0"/>
+          <a:chExt cx="0" cy="0"/>
+        </a:xfrm>
+      </p:grpSpPr>
+      <p:sp>
+        <p:nvSpPr>
+          <p:cNvPr id="2" name="Slide Image Placeholder 1"/>
+          <p:cNvSpPr>
+            <a:spLocks noGrp="1" noRot="1" noChangeAspect="1"/>
+          </p:cNvSpPr>
+          <p:nvPr>
+            <p:ph type="sldImg"/>
+          </p:nvPr>
+        </p:nvSpPr>
+        <p:spPr/>
+      </p:sp>
+      <p:sp>
+        <p:nvSpPr>
+          <p:cNvPr id="3" name="Notes Placeholder 2"/>
+          <p:cNvSpPr>
+            <a:spLocks noGrp="1"/>
+          </p:cNvSpPr>
+          <p:nvPr>
+            <p:ph type="body" idx="1"/>
+          </p:nvPr>
+        </p:nvSpPr>
+        <p:spPr/>
+        <p:txBody>
+          <a:bodyPr/>
+          <a:lstStyle/>
+          <a:p>
+            <a:endParaRPr lang="en-IN" dirty="0"/>
+          </a:p>
+        </p:txBody>
+      </p:sp>
+      <p:sp>
+        <p:nvSpPr>
+          <p:cNvPr id="4" name="Slide Number Placeholder 3"/>
+          <p:cNvSpPr>
+            <a:spLocks noGrp="1"/>
+          </p:cNvSpPr>
+          <p:nvPr>
+            <p:ph type="sldNum" sz="quarter" idx="5"/>
+          </p:nvPr>
+        </p:nvSpPr>
+        <p:spPr/>
+        <p:txBody>
+          <a:bodyPr/>
+          <a:lstStyle/>
+          <a:p>
+            <a:fld id="{BE7BD907-10E1-4554-8631-1965B6043C47}" type="slidenum">
+              <a:rPr lang="en-IN" smtClean="0"/>
+              <a:t>23</a:t>
+            </a:fld>
+            <a:endParaRPr lang="en-IN"/>
+          </a:p>
+        </p:txBody>
+      </p:sp>
+    </p:spTree>
+    <p:extLst>
+      <p:ext uri="{BB962C8B-B14F-4D97-AF65-F5344CB8AC3E}">
+        <p14:creationId xmlns:p14="http://schemas.microsoft.com/office/powerpoint/2010/main" val="2395947162"/>
+      </p:ext>
+    </p:extLst>
+  </p:cSld>
+  <p:clrMapOvr>
+    <a:masterClrMapping/>
+  </p:clrMapOvr>
+</p:notes>
+</file>
+
+<file path=ppt/notesSlides/notesSlide2.xml><?xml version="1.0" encoding="utf-8"?>
+<p:notes xmlns:a="http://schemas.openxmlformats.org/drawingml/2006/main" xmlns:r="http://schemas.openxmlformats.org/officeDocument/2006/relationships" xmlns:p="http://schemas.openxmlformats.org/presentationml/2006/main">
+  <p:cSld>
+    <p:spTree>
+      <p:nvGrpSpPr>
+        <p:cNvPr id="1" name="">
+          <a:extLst>
+            <a:ext uri="{FF2B5EF4-FFF2-40B4-BE49-F238E27FC236}">
+              <a16:creationId xmlns:a16="http://schemas.microsoft.com/office/drawing/2014/main" id="{9BD37FC1-BD8D-2E47-B477-1CB23EB5486C}"/>
+            </a:ext>
+          </a:extLst>
+        </p:cNvPr>
+        <p:cNvGrpSpPr/>
+        <p:nvPr/>
+      </p:nvGrpSpPr>
+      <p:grpSpPr>
+        <a:xfrm>
+          <a:off x="0" y="0"/>
+          <a:ext cx="0" cy="0"/>
+          <a:chOff x="0" y="0"/>
+          <a:chExt cx="0" cy="0"/>
+        </a:xfrm>
+      </p:grpSpPr>
+      <p:sp>
+        <p:nvSpPr>
+          <p:cNvPr id="2" name="Slide Image Placeholder 1">
+            <a:extLst>
+              <a:ext uri="{FF2B5EF4-FFF2-40B4-BE49-F238E27FC236}">
+                <a16:creationId xmlns:a16="http://schemas.microsoft.com/office/drawing/2014/main" id="{521DA90D-F3E5-E911-5F40-3207ACC58DC2}"/>
+              </a:ext>
+            </a:extLst>
+          </p:cNvPr>
+          <p:cNvSpPr>
+            <a:spLocks noGrp="1" noRot="1" noChangeAspect="1"/>
+          </p:cNvSpPr>
+          <p:nvPr>
+            <p:ph type="sldImg"/>
+          </p:nvPr>
+        </p:nvSpPr>
+        <p:spPr/>
+      </p:sp>
+      <p:sp>
+        <p:nvSpPr>
+          <p:cNvPr id="3" name="Notes Placeholder 2">
+            <a:extLst>
+              <a:ext uri="{FF2B5EF4-FFF2-40B4-BE49-F238E27FC236}">
+                <a16:creationId xmlns:a16="http://schemas.microsoft.com/office/drawing/2014/main" id="{C8ED6F99-28A0-6B5C-9848-5B3D8D92EE85}"/>
+              </a:ext>
+            </a:extLst>
+          </p:cNvPr>
+          <p:cNvSpPr>
+            <a:spLocks noGrp="1"/>
+          </p:cNvSpPr>
+          <p:nvPr>
+            <p:ph type="body" idx="1"/>
+          </p:nvPr>
+        </p:nvSpPr>
+        <p:spPr/>
+        <p:txBody>
+          <a:bodyPr/>
+          <a:lstStyle/>
+          <a:p>
+            <a:endParaRPr lang="en-IN" dirty="0"/>
+          </a:p>
+        </p:txBody>
+      </p:sp>
+      <p:sp>
+        <p:nvSpPr>
+          <p:cNvPr id="4" name="Slide Number Placeholder 3">
+            <a:extLst>
+              <a:ext uri="{FF2B5EF4-FFF2-40B4-BE49-F238E27FC236}">
+                <a16:creationId xmlns:a16="http://schemas.microsoft.com/office/drawing/2014/main" id="{863887CA-761A-5947-E606-D8FF2EE51BD4}"/>
+              </a:ext>
+            </a:extLst>
+          </p:cNvPr>
+          <p:cNvSpPr>
+            <a:spLocks noGrp="1"/>
+          </p:cNvSpPr>
+          <p:nvPr>
+            <p:ph type="sldNum" sz="quarter" idx="5"/>
+          </p:nvPr>
+        </p:nvSpPr>
+        <p:spPr/>
+        <p:txBody>
+          <a:bodyPr/>
+          <a:lstStyle/>
+          <a:p>
+            <a:fld id="{BE7BD907-10E1-4554-8631-1965B6043C47}" type="slidenum">
+              <a:rPr lang="en-IN" smtClean="0"/>
+              <a:t>24</a:t>
+            </a:fld>
+            <a:endParaRPr lang="en-IN"/>
+          </a:p>
+        </p:txBody>
+      </p:sp>
+    </p:spTree>
+    <p:extLst>
+      <p:ext uri="{BB962C8B-B14F-4D97-AF65-F5344CB8AC3E}">
+        <p14:creationId xmlns:p14="http://schemas.microsoft.com/office/powerpoint/2010/main" val="1230844601"/>
+      </p:ext>
+    </p:extLst>
+  </p:cSld>
+  <p:clrMapOvr>
+    <a:masterClrMapping/>
+  </p:clrMapOvr>
+</p:notes>
+</file>
+
+<file path=ppt/notesSlides/notesSlide3.xml><?xml version="1.0" encoding="utf-8"?>
+<p:notes xmlns:a="http://schemas.openxmlformats.org/drawingml/2006/main" xmlns:r="http://schemas.openxmlformats.org/officeDocument/2006/relationships" xmlns:p="http://schemas.openxmlformats.org/presentationml/2006/main">
+  <p:cSld>
+    <p:spTree>
+      <p:nvGrpSpPr>
+        <p:cNvPr id="1" name="">
+          <a:extLst>
+            <a:ext uri="{FF2B5EF4-FFF2-40B4-BE49-F238E27FC236}">
+              <a16:creationId xmlns:a16="http://schemas.microsoft.com/office/drawing/2014/main" id="{717B96CF-7863-A672-7821-8B6CF3FA62BC}"/>
+            </a:ext>
+          </a:extLst>
+        </p:cNvPr>
+        <p:cNvGrpSpPr/>
+        <p:nvPr/>
+      </p:nvGrpSpPr>
+      <p:grpSpPr>
+        <a:xfrm>
+          <a:off x="0" y="0"/>
+          <a:ext cx="0" cy="0"/>
+          <a:chOff x="0" y="0"/>
+          <a:chExt cx="0" cy="0"/>
+        </a:xfrm>
+      </p:grpSpPr>
+      <p:sp>
+        <p:nvSpPr>
+          <p:cNvPr id="2" name="Slide Image Placeholder 1">
+            <a:extLst>
+              <a:ext uri="{FF2B5EF4-FFF2-40B4-BE49-F238E27FC236}">
+                <a16:creationId xmlns:a16="http://schemas.microsoft.com/office/drawing/2014/main" id="{8F2014E1-E22D-3E71-C9A5-C4188A7F406F}"/>
+              </a:ext>
+            </a:extLst>
+          </p:cNvPr>
+          <p:cNvSpPr>
+            <a:spLocks noGrp="1" noRot="1" noChangeAspect="1"/>
+          </p:cNvSpPr>
+          <p:nvPr>
+            <p:ph type="sldImg"/>
+          </p:nvPr>
+        </p:nvSpPr>
+        <p:spPr/>
+      </p:sp>
+      <p:sp>
+        <p:nvSpPr>
+          <p:cNvPr id="3" name="Notes Placeholder 2">
+            <a:extLst>
+              <a:ext uri="{FF2B5EF4-FFF2-40B4-BE49-F238E27FC236}">
+                <a16:creationId xmlns:a16="http://schemas.microsoft.com/office/drawing/2014/main" id="{88816AAA-4903-C056-CC76-A63B36E748C5}"/>
+              </a:ext>
+            </a:extLst>
+          </p:cNvPr>
+          <p:cNvSpPr>
+            <a:spLocks noGrp="1"/>
+          </p:cNvSpPr>
+          <p:nvPr>
+            <p:ph type="body" idx="1"/>
+          </p:nvPr>
+        </p:nvSpPr>
+        <p:spPr/>
+        <p:txBody>
+          <a:bodyPr/>
+          <a:lstStyle/>
+          <a:p>
+            <a:endParaRPr lang="en-IN" dirty="0"/>
+          </a:p>
+        </p:txBody>
+      </p:sp>
+      <p:sp>
+        <p:nvSpPr>
+          <p:cNvPr id="4" name="Slide Number Placeholder 3">
+            <a:extLst>
+              <a:ext uri="{FF2B5EF4-FFF2-40B4-BE49-F238E27FC236}">
+                <a16:creationId xmlns:a16="http://schemas.microsoft.com/office/drawing/2014/main" id="{1CB616AB-4991-7EE0-7430-CA3BF088AD9E}"/>
+              </a:ext>
+            </a:extLst>
+          </p:cNvPr>
+          <p:cNvSpPr>
+            <a:spLocks noGrp="1"/>
+          </p:cNvSpPr>
+          <p:nvPr>
+            <p:ph type="sldNum" sz="quarter" idx="5"/>
+          </p:nvPr>
+        </p:nvSpPr>
+        <p:spPr/>
+        <p:txBody>
+          <a:bodyPr/>
+          <a:lstStyle/>
+          <a:p>
+            <a:fld id="{BE7BD907-10E1-4554-8631-1965B6043C47}" type="slidenum">
+              <a:rPr lang="en-IN" smtClean="0"/>
+              <a:t>25</a:t>
+            </a:fld>
+            <a:endParaRPr lang="en-IN"/>
+          </a:p>
+        </p:txBody>
+      </p:sp>
+    </p:spTree>
+    <p:extLst>
+      <p:ext uri="{BB962C8B-B14F-4D97-AF65-F5344CB8AC3E}">
+        <p14:creationId xmlns:p14="http://schemas.microsoft.com/office/powerpoint/2010/main" val="1424149597"/>
+      </p:ext>
+    </p:extLst>
+  </p:cSld>
+  <p:clrMapOvr>
+    <a:masterClrMapping/>
+  </p:clrMapOvr>
+</p:notes>
 </file>
 
 <file path=ppt/slideLayouts/slideLayout1.xml><?xml version="1.0" encoding="utf-8"?>
@@ -480,7 +1136,7 @@
           <a:p>
             <a:fld id="{6383FAE1-13DE-4511-8C1B-C8AFB720664C}" type="datetimeFigureOut">
               <a:rPr lang="en-US" smtClean="0"/>
-              <a:t>5/8/2026</a:t>
+              <a:t>5/25/2026</a:t>
             </a:fld>
             <a:endParaRPr lang="en-US"/>
           </a:p>
@@ -678,7 +1334,7 @@
           <a:p>
             <a:fld id="{6383FAE1-13DE-4511-8C1B-C8AFB720664C}" type="datetimeFigureOut">
               <a:rPr lang="en-US" smtClean="0"/>
-              <a:t>5/8/2026</a:t>
+              <a:t>5/25/2026</a:t>
             </a:fld>
             <a:endParaRPr lang="en-US"/>
           </a:p>
@@ -886,7 +1542,7 @@
           <a:p>
             <a:fld id="{6383FAE1-13DE-4511-8C1B-C8AFB720664C}" type="datetimeFigureOut">
               <a:rPr lang="en-US" smtClean="0"/>
-              <a:t>5/8/2026</a:t>
+              <a:t>5/25/2026</a:t>
             </a:fld>
             <a:endParaRPr lang="en-US"/>
           </a:p>
@@ -1084,7 +1740,7 @@
           <a:p>
             <a:fld id="{6383FAE1-13DE-4511-8C1B-C8AFB720664C}" type="datetimeFigureOut">
               <a:rPr lang="en-US" smtClean="0"/>
-              <a:t>5/8/2026</a:t>
+              <a:t>5/25/2026</a:t>
             </a:fld>
             <a:endParaRPr lang="en-US"/>
           </a:p>
@@ -1359,7 +2015,7 @@
           <a:p>
             <a:fld id="{6383FAE1-13DE-4511-8C1B-C8AFB720664C}" type="datetimeFigureOut">
               <a:rPr lang="en-US" smtClean="0"/>
-              <a:t>5/8/2026</a:t>
+              <a:t>5/25/2026</a:t>
             </a:fld>
             <a:endParaRPr lang="en-US"/>
           </a:p>
@@ -1624,7 +2280,7 @@
           <a:p>
             <a:fld id="{6383FAE1-13DE-4511-8C1B-C8AFB720664C}" type="datetimeFigureOut">
               <a:rPr lang="en-US" smtClean="0"/>
-              <a:t>5/8/2026</a:t>
+              <a:t>5/25/2026</a:t>
             </a:fld>
             <a:endParaRPr lang="en-US"/>
           </a:p>
@@ -2036,7 +2692,7 @@
           <a:p>
             <a:fld id="{6383FAE1-13DE-4511-8C1B-C8AFB720664C}" type="datetimeFigureOut">
               <a:rPr lang="en-US" smtClean="0"/>
-              <a:t>5/8/2026</a:t>
+              <a:t>5/25/2026</a:t>
             </a:fld>
             <a:endParaRPr lang="en-US"/>
           </a:p>
@@ -2177,7 +2833,7 @@
           <a:p>
             <a:fld id="{6383FAE1-13DE-4511-8C1B-C8AFB720664C}" type="datetimeFigureOut">
               <a:rPr lang="en-US" smtClean="0"/>
-              <a:t>5/8/2026</a:t>
+              <a:t>5/25/2026</a:t>
             </a:fld>
             <a:endParaRPr lang="en-US"/>
           </a:p>
@@ -2290,7 +2946,7 @@
           <a:p>
             <a:fld id="{6383FAE1-13DE-4511-8C1B-C8AFB720664C}" type="datetimeFigureOut">
               <a:rPr lang="en-US" smtClean="0"/>
-              <a:t>5/8/2026</a:t>
+              <a:t>5/25/2026</a:t>
             </a:fld>
             <a:endParaRPr lang="en-US"/>
           </a:p>
@@ -2601,7 +3257,7 @@
           <a:p>
             <a:fld id="{6383FAE1-13DE-4511-8C1B-C8AFB720664C}" type="datetimeFigureOut">
               <a:rPr lang="en-US" smtClean="0"/>
-              <a:t>5/8/2026</a:t>
+              <a:t>5/25/2026</a:t>
             </a:fld>
             <a:endParaRPr lang="en-US"/>
           </a:p>
@@ -2892,7 +3548,7 @@
           <a:p>
             <a:fld id="{6383FAE1-13DE-4511-8C1B-C8AFB720664C}" type="datetimeFigureOut">
               <a:rPr lang="en-US" smtClean="0"/>
-              <a:t>5/8/2026</a:t>
+              <a:t>5/25/2026</a:t>
             </a:fld>
             <a:endParaRPr lang="en-US"/>
           </a:p>
@@ -3136,7 +3792,7 @@
           <a:p>
             <a:fld id="{6383FAE1-13DE-4511-8C1B-C8AFB720664C}" type="datetimeFigureOut">
               <a:rPr lang="en-US" smtClean="0"/>
-              <a:t>5/8/2026</a:t>
+              <a:t>5/25/2026</a:t>
             </a:fld>
             <a:endParaRPr lang="en-US"/>
           </a:p>
@@ -3759,7 +4415,7 @@
         <p:spPr>
           <a:xfrm>
             <a:off x="502920" y="1883326"/>
-            <a:ext cx="11177803" cy="2677656"/>
+            <a:ext cx="11177803" cy="3416320"/>
           </a:xfrm>
           <a:prstGeom prst="rect">
             <a:avLst/>
@@ -3848,7 +4504,58 @@
                   </a:schemeClr>
                 </a:solidFill>
               </a:rPr>
-              <a:t>Prompt engineering and optimization involve designing, testing, and refining input text (prompts) to guide AI models like LLMs to produce accurate, relevant, and high-quality output</a:t>
+              <a:t>Prompt engineering and optimization involve designing, testing, and refining input text (prompts) to guide AI models like LLMs to produce</a:t>
+            </a:r>
+          </a:p>
+          <a:p>
+            <a:pPr marL="342900" indent="-342900">
+              <a:buFont typeface="Arial" panose="020B0604020202020204" pitchFamily="34" charset="0"/>
+              <a:buChar char="•"/>
+            </a:pPr>
+            <a:r>
+              <a:rPr lang="en-US" sz="2400" dirty="0">
+                <a:solidFill>
+                  <a:schemeClr val="accent6">
+                    <a:lumMod val="60000"/>
+                    <a:lumOff val="40000"/>
+                  </a:schemeClr>
+                </a:solidFill>
+              </a:rPr>
+              <a:t> accurate, </a:t>
+            </a:r>
+          </a:p>
+          <a:p>
+            <a:pPr marL="342900" indent="-342900">
+              <a:buFont typeface="Arial" panose="020B0604020202020204" pitchFamily="34" charset="0"/>
+              <a:buChar char="•"/>
+            </a:pPr>
+            <a:r>
+              <a:rPr lang="en-US" sz="2400" dirty="0">
+                <a:solidFill>
+                  <a:schemeClr val="accent6">
+                    <a:lumMod val="60000"/>
+                    <a:lumOff val="40000"/>
+                  </a:schemeClr>
+                </a:solidFill>
+              </a:rPr>
+              <a:t>relevant, and </a:t>
+            </a:r>
+          </a:p>
+          <a:p>
+            <a:pPr marL="342900" indent="-342900">
+              <a:buFont typeface="Arial" panose="020B0604020202020204" pitchFamily="34" charset="0"/>
+              <a:buChar char="•"/>
+            </a:pPr>
+            <a:r>
+              <a:rPr lang="en-US" sz="2400" dirty="0">
+                <a:solidFill>
+                  <a:schemeClr val="accent6">
+                    <a:lumMod val="60000"/>
+                    <a:lumOff val="40000"/>
+                  </a:schemeClr>
+                </a:solidFill>
+              </a:rPr>
+              <a:t>high-quality output</a:t>
             </a:r>
           </a:p>
         </p:txBody>
@@ -3947,7 +4654,7 @@
         <p:spPr>
           <a:xfrm>
             <a:off x="325152" y="958125"/>
-            <a:ext cx="11232864" cy="4524315"/>
+            <a:ext cx="11232864" cy="4154984"/>
           </a:xfrm>
           <a:prstGeom prst="rect">
             <a:avLst/>
@@ -4013,7 +4720,7 @@
           </a:p>
           <a:p>
             <a:r>
-              <a:rPr lang="en-US" sz="2400" dirty="0">
+              <a:rPr lang="en-US" sz="2400" u="sng" dirty="0">
                 <a:solidFill>
                   <a:schemeClr val="accent6">
                     <a:lumMod val="60000"/>
@@ -4048,32 +4755,6 @@
             </a:endParaRPr>
           </a:p>
           <a:p>
-            <a:r>
-              <a:rPr lang="en-US" sz="2400" dirty="0">
-                <a:solidFill>
-                  <a:schemeClr val="accent6">
-                    <a:lumMod val="60000"/>
-                    <a:lumOff val="40000"/>
-                  </a:schemeClr>
-                </a:solidFill>
-              </a:rPr>
-              <a:t>Better Prompt: </a:t>
-            </a:r>
-          </a:p>
-          <a:p>
-            <a:r>
-              <a:rPr lang="en-US" sz="2400" dirty="0">
-                <a:solidFill>
-                  <a:schemeClr val="accent6">
-                    <a:lumMod val="60000"/>
-                    <a:lumOff val="40000"/>
-                  </a:schemeClr>
-                </a:solidFill>
-              </a:rPr>
-              <a:t>Explain Type 2 diabetes for class 11 students in 100 words. The students are all majoring in biology. </a:t>
-            </a:r>
-          </a:p>
-          <a:p>
             <a:endParaRPr lang="en-US" sz="2400" dirty="0">
               <a:solidFill>
                 <a:schemeClr val="accent6">
@@ -4084,14 +4765,74 @@
             </a:endParaRPr>
           </a:p>
           <a:p>
-            <a:endParaRPr lang="en-US" sz="2400" dirty="0">
-              <a:solidFill>
-                <a:schemeClr val="accent6">
-                  <a:lumMod val="60000"/>
-                  <a:lumOff val="40000"/>
-                </a:schemeClr>
-              </a:solidFill>
-            </a:endParaRPr>
+            <a:r>
+              <a:rPr lang="en-US" sz="2400" u="sng" dirty="0">
+                <a:solidFill>
+                  <a:schemeClr val="accent6">
+                    <a:lumMod val="60000"/>
+                    <a:lumOff val="40000"/>
+                  </a:schemeClr>
+                </a:solidFill>
+              </a:rPr>
+              <a:t>Better Prompt: </a:t>
+            </a:r>
+          </a:p>
+          <a:p>
+            <a:r>
+              <a:rPr lang="en-US" sz="2400" dirty="0">
+                <a:solidFill>
+                  <a:schemeClr val="accent6">
+                    <a:lumMod val="60000"/>
+                    <a:lumOff val="40000"/>
+                  </a:schemeClr>
+                </a:solidFill>
+              </a:rPr>
+              <a:t>Explain Type 2 diabetes for </a:t>
+            </a:r>
+            <a:r>
+              <a:rPr lang="en-US" sz="2400" b="1" u="sng" dirty="0">
+                <a:solidFill>
+                  <a:schemeClr val="accent6">
+                    <a:lumMod val="60000"/>
+                    <a:lumOff val="40000"/>
+                  </a:schemeClr>
+                </a:solidFill>
+              </a:rPr>
+              <a:t>class 11 students</a:t>
+            </a:r>
+            <a:r>
+              <a:rPr lang="en-US" sz="2400" dirty="0">
+                <a:solidFill>
+                  <a:schemeClr val="accent6">
+                    <a:lumMod val="60000"/>
+                    <a:lumOff val="40000"/>
+                  </a:schemeClr>
+                </a:solidFill>
+              </a:rPr>
+              <a:t> in 100 words. The students are all </a:t>
+            </a:r>
+            <a:r>
+              <a:rPr lang="en-US" sz="2400" b="1" u="sng" dirty="0">
+                <a:solidFill>
+                  <a:schemeClr val="accent6">
+                    <a:lumMod val="60000"/>
+                    <a:lumOff val="40000"/>
+                  </a:schemeClr>
+                </a:solidFill>
+              </a:rPr>
+              <a:t>majoring in biology</a:t>
+            </a:r>
+            <a:r>
+              <a:rPr lang="en-US" sz="2400" dirty="0">
+                <a:solidFill>
+                  <a:schemeClr val="accent6">
+                    <a:lumMod val="60000"/>
+                    <a:lumOff val="40000"/>
+                  </a:schemeClr>
+                </a:solidFill>
+              </a:rPr>
+              <a:t>. </a:t>
+            </a:r>
           </a:p>
         </p:txBody>
       </p:sp>
@@ -4243,7 +4984,7 @@
           </a:p>
           <a:p>
             <a:r>
-              <a:rPr lang="en-US" sz="2400" dirty="0">
+              <a:rPr lang="en-US" sz="2400" u="sng" dirty="0">
                 <a:solidFill>
                   <a:schemeClr val="accent6">
                     <a:lumMod val="60000"/>
@@ -4264,7 +5005,29 @@
                   </a:schemeClr>
                 </a:solidFill>
               </a:rPr>
-              <a:t>What is the cure for Type 2 diabetes?  If unsure, say "I don’t know".</a:t>
+              <a:t>What is the cure for Type 2 diabetes?  </a:t>
+            </a:r>
+            <a:r>
+              <a:rPr lang="en-US" sz="2400" b="1" i="1" dirty="0">
+                <a:solidFill>
+                  <a:schemeClr val="accent6">
+                    <a:lumMod val="60000"/>
+                    <a:lumOff val="40000"/>
+                  </a:schemeClr>
+                </a:solidFill>
+              </a:rPr>
+              <a:t>If unsure, say "I don’t know"</a:t>
+            </a:r>
+            <a:r>
+              <a:rPr lang="en-US" sz="2400" dirty="0">
+                <a:solidFill>
+                  <a:schemeClr val="accent6">
+                    <a:lumMod val="60000"/>
+                    <a:lumOff val="40000"/>
+                  </a:schemeClr>
+                </a:solidFill>
+              </a:rPr>
+              <a:t>.</a:t>
             </a:r>
           </a:p>
         </p:txBody>
@@ -4284,7 +5047,7 @@
         <p:spPr>
           <a:xfrm>
             <a:off x="224028" y="4144232"/>
-            <a:ext cx="10703052" cy="1569660"/>
+            <a:ext cx="10703052" cy="1938992"/>
           </a:xfrm>
           <a:prstGeom prst="rect">
             <a:avLst/>
@@ -4310,8 +5073,18 @@
             </a:r>
           </a:p>
           <a:p>
-            <a:r>
-              <a:rPr lang="en-US" sz="2400" dirty="0">
+            <a:endParaRPr lang="en-US" sz="2400" b="1" dirty="0">
+              <a:solidFill>
+                <a:schemeClr val="accent6">
+                  <a:lumMod val="60000"/>
+                  <a:lumOff val="40000"/>
+                </a:schemeClr>
+              </a:solidFill>
+            </a:endParaRPr>
+          </a:p>
+          <a:p>
+            <a:r>
+              <a:rPr lang="en-US" sz="2400" u="sng" dirty="0">
                 <a:solidFill>
                   <a:schemeClr val="accent6">
                     <a:lumMod val="60000"/>
@@ -4337,7 +5110,7 @@
           </a:p>
           <a:p>
             <a:r>
-              <a:rPr lang="en-US" sz="2400" dirty="0">
+              <a:rPr lang="en-US" sz="2400" b="1" i="1" dirty="0">
                 <a:solidFill>
                   <a:schemeClr val="accent6">
                     <a:lumMod val="60000"/>
@@ -4636,6 +5409,381 @@
         <p:cNvPr id="1" name="">
           <a:extLst>
             <a:ext uri="{FF2B5EF4-FFF2-40B4-BE49-F238E27FC236}">
+              <a16:creationId xmlns:a16="http://schemas.microsoft.com/office/drawing/2014/main" id="{5359C7AF-AB77-1C07-7828-B14197FF1CC9}"/>
+            </a:ext>
+          </a:extLst>
+        </p:cNvPr>
+        <p:cNvGrpSpPr/>
+        <p:nvPr/>
+      </p:nvGrpSpPr>
+      <p:grpSpPr>
+        <a:xfrm>
+          <a:off x="0" y="0"/>
+          <a:ext cx="0" cy="0"/>
+          <a:chOff x="0" y="0"/>
+          <a:chExt cx="0" cy="0"/>
+        </a:xfrm>
+      </p:grpSpPr>
+      <p:sp>
+        <p:nvSpPr>
+          <p:cNvPr id="9" name="TextBox 8">
+            <a:extLst>
+              <a:ext uri="{FF2B5EF4-FFF2-40B4-BE49-F238E27FC236}">
+                <a16:creationId xmlns:a16="http://schemas.microsoft.com/office/drawing/2014/main" id="{B239BD44-B356-B35D-1249-5547AB9A573A}"/>
+              </a:ext>
+            </a:extLst>
+          </p:cNvPr>
+          <p:cNvSpPr txBox="1"/>
+          <p:nvPr/>
+        </p:nvSpPr>
+        <p:spPr>
+          <a:xfrm>
+            <a:off x="592087" y="123858"/>
+            <a:ext cx="9859604" cy="523220"/>
+          </a:xfrm>
+          <a:prstGeom prst="rect">
+            <a:avLst/>
+          </a:prstGeom>
+          <a:noFill/>
+        </p:spPr>
+        <p:txBody>
+          <a:bodyPr wrap="square" rtlCol="0">
+            <a:spAutoFit/>
+          </a:bodyPr>
+          <a:lstStyle/>
+          <a:p>
+            <a:pPr algn="ctr"/>
+            <a:r>
+              <a:rPr lang="en-US" sz="2800" dirty="0">
+                <a:solidFill>
+                  <a:schemeClr val="accent6">
+                    <a:lumMod val="60000"/>
+                    <a:lumOff val="40000"/>
+                  </a:schemeClr>
+                </a:solidFill>
+              </a:rPr>
+              <a:t>Hallucinations – Why AI Lies &amp; How to Stop It</a:t>
+            </a:r>
+          </a:p>
+        </p:txBody>
+      </p:sp>
+      <p:sp>
+        <p:nvSpPr>
+          <p:cNvPr id="3" name="TextBox 2">
+            <a:extLst>
+              <a:ext uri="{FF2B5EF4-FFF2-40B4-BE49-F238E27FC236}">
+                <a16:creationId xmlns:a16="http://schemas.microsoft.com/office/drawing/2014/main" id="{4FF59EFF-6895-31D6-08D5-72C563082AC9}"/>
+              </a:ext>
+            </a:extLst>
+          </p:cNvPr>
+          <p:cNvSpPr txBox="1"/>
+          <p:nvPr/>
+        </p:nvSpPr>
+        <p:spPr>
+          <a:xfrm>
+            <a:off x="242857" y="912405"/>
+            <a:ext cx="8863780" cy="3785652"/>
+          </a:xfrm>
+          <a:prstGeom prst="rect">
+            <a:avLst/>
+          </a:prstGeom>
+          <a:noFill/>
+        </p:spPr>
+        <p:txBody>
+          <a:bodyPr wrap="square">
+            <a:spAutoFit/>
+          </a:bodyPr>
+          <a:lstStyle/>
+          <a:p>
+            <a:r>
+              <a:rPr lang="en-US" sz="2400" b="1" dirty="0">
+                <a:solidFill>
+                  <a:schemeClr val="accent6">
+                    <a:lumMod val="60000"/>
+                    <a:lumOff val="40000"/>
+                  </a:schemeClr>
+                </a:solidFill>
+              </a:rPr>
+              <a:t>4) Break Tasks into Steps</a:t>
+            </a:r>
+          </a:p>
+          <a:p>
+            <a:r>
+              <a:rPr lang="en-US" sz="2400" dirty="0">
+                <a:solidFill>
+                  <a:schemeClr val="accent6">
+                    <a:lumMod val="60000"/>
+                    <a:lumOff val="40000"/>
+                  </a:schemeClr>
+                </a:solidFill>
+              </a:rPr>
+              <a:t>Instead of:</a:t>
+            </a:r>
+          </a:p>
+          <a:p>
+            <a:r>
+              <a:rPr lang="en-US" sz="2400" dirty="0">
+                <a:solidFill>
+                  <a:schemeClr val="accent6">
+                    <a:lumMod val="60000"/>
+                    <a:lumOff val="40000"/>
+                  </a:schemeClr>
+                </a:solidFill>
+              </a:rPr>
+              <a:t>Write me a python code that analyzes the iris dataset</a:t>
+            </a:r>
+          </a:p>
+          <a:p>
+            <a:endParaRPr lang="en-US" sz="2400" dirty="0">
+              <a:solidFill>
+                <a:schemeClr val="accent6">
+                  <a:lumMod val="60000"/>
+                  <a:lumOff val="40000"/>
+                </a:schemeClr>
+              </a:solidFill>
+            </a:endParaRPr>
+          </a:p>
+          <a:p>
+            <a:r>
+              <a:rPr lang="en-US" sz="2400" dirty="0">
+                <a:solidFill>
+                  <a:schemeClr val="accent6">
+                    <a:lumMod val="60000"/>
+                    <a:lumOff val="40000"/>
+                  </a:schemeClr>
+                </a:solidFill>
+              </a:rPr>
+              <a:t>Use:</a:t>
+            </a:r>
+          </a:p>
+          <a:p>
+            <a:r>
+              <a:rPr lang="en-US" sz="2400" b="1" dirty="0">
+                <a:solidFill>
+                  <a:schemeClr val="accent6">
+                    <a:lumMod val="60000"/>
+                    <a:lumOff val="40000"/>
+                  </a:schemeClr>
+                </a:solidFill>
+              </a:rPr>
+              <a:t>Step 1: </a:t>
+            </a:r>
+            <a:r>
+              <a:rPr lang="en-US" sz="2400" dirty="0">
+                <a:solidFill>
+                  <a:schemeClr val="accent6">
+                    <a:lumMod val="60000"/>
+                    <a:lumOff val="40000"/>
+                  </a:schemeClr>
+                </a:solidFill>
+              </a:rPr>
+              <a:t>How should I load a iris data into pandas </a:t>
+            </a:r>
+            <a:r>
+              <a:rPr lang="en-US" sz="2400" dirty="0" err="1">
+                <a:solidFill>
+                  <a:schemeClr val="accent6">
+                    <a:lumMod val="60000"/>
+                    <a:lumOff val="40000"/>
+                  </a:schemeClr>
+                </a:solidFill>
+              </a:rPr>
+              <a:t>dataframe</a:t>
+            </a:r>
+            <a:r>
+              <a:rPr lang="en-US" sz="2400" dirty="0">
+                <a:solidFill>
+                  <a:schemeClr val="accent6">
+                    <a:lumMod val="60000"/>
+                    <a:lumOff val="40000"/>
+                  </a:schemeClr>
+                </a:solidFill>
+              </a:rPr>
+              <a:t> </a:t>
+            </a:r>
+            <a:r>
+              <a:rPr lang="en-US" sz="2400" dirty="0" err="1">
+                <a:solidFill>
+                  <a:schemeClr val="accent6">
+                    <a:lumMod val="60000"/>
+                    <a:lumOff val="40000"/>
+                  </a:schemeClr>
+                </a:solidFill>
+              </a:rPr>
+              <a:t>df</a:t>
+            </a:r>
+            <a:r>
+              <a:rPr lang="en-US" sz="2400" dirty="0">
+                <a:solidFill>
+                  <a:schemeClr val="accent6">
+                    <a:lumMod val="60000"/>
+                    <a:lumOff val="40000"/>
+                  </a:schemeClr>
+                </a:solidFill>
+              </a:rPr>
+              <a:t>.</a:t>
+            </a:r>
+          </a:p>
+          <a:p>
+            <a:r>
+              <a:rPr lang="en-US" sz="2400" b="1" dirty="0">
+                <a:solidFill>
+                  <a:schemeClr val="accent6">
+                    <a:lumMod val="60000"/>
+                    <a:lumOff val="40000"/>
+                  </a:schemeClr>
+                </a:solidFill>
+              </a:rPr>
+              <a:t>Step 2: </a:t>
+            </a:r>
+            <a:r>
+              <a:rPr lang="en-US" sz="2400" dirty="0">
+                <a:solidFill>
+                  <a:schemeClr val="accent6">
+                    <a:lumMod val="60000"/>
+                    <a:lumOff val="40000"/>
+                  </a:schemeClr>
+                </a:solidFill>
+              </a:rPr>
+              <a:t>How do I print the </a:t>
+            </a:r>
+            <a:r>
+              <a:rPr lang="en-US" sz="2400" dirty="0" err="1">
+                <a:solidFill>
+                  <a:schemeClr val="accent6">
+                    <a:lumMod val="60000"/>
+                    <a:lumOff val="40000"/>
+                  </a:schemeClr>
+                </a:solidFill>
+              </a:rPr>
+              <a:t>dataframe</a:t>
+            </a:r>
+            <a:r>
+              <a:rPr lang="en-US" sz="2400" dirty="0">
+                <a:solidFill>
+                  <a:schemeClr val="accent6">
+                    <a:lumMod val="60000"/>
+                    <a:lumOff val="40000"/>
+                  </a:schemeClr>
+                </a:solidFill>
+              </a:rPr>
+              <a:t> </a:t>
+            </a:r>
+            <a:r>
+              <a:rPr lang="en-US" sz="2400" dirty="0" err="1">
+                <a:solidFill>
+                  <a:schemeClr val="accent6">
+                    <a:lumMod val="60000"/>
+                    <a:lumOff val="40000"/>
+                  </a:schemeClr>
+                </a:solidFill>
+              </a:rPr>
+              <a:t>df</a:t>
+            </a:r>
+            <a:endParaRPr lang="en-US" sz="2400" b="1" dirty="0">
+              <a:solidFill>
+                <a:schemeClr val="accent6">
+                  <a:lumMod val="60000"/>
+                  <a:lumOff val="40000"/>
+                </a:schemeClr>
+              </a:solidFill>
+            </a:endParaRPr>
+          </a:p>
+          <a:p>
+            <a:r>
+              <a:rPr lang="en-US" sz="2400" b="1" dirty="0">
+                <a:solidFill>
+                  <a:schemeClr val="accent6">
+                    <a:lumMod val="60000"/>
+                    <a:lumOff val="40000"/>
+                  </a:schemeClr>
+                </a:solidFill>
+              </a:rPr>
+              <a:t>Step 3</a:t>
+            </a:r>
+            <a:r>
+              <a:rPr lang="en-US" sz="2400" dirty="0">
+                <a:solidFill>
+                  <a:schemeClr val="accent6">
+                    <a:lumMod val="60000"/>
+                    <a:lumOff val="40000"/>
+                  </a:schemeClr>
+                </a:solidFill>
+              </a:rPr>
+              <a:t>: How can I identify the datatype  </a:t>
+            </a:r>
+          </a:p>
+          <a:p>
+            <a:r>
+              <a:rPr lang="en-US" sz="2400" b="1" dirty="0">
+                <a:solidFill>
+                  <a:schemeClr val="accent6">
+                    <a:lumMod val="60000"/>
+                    <a:lumOff val="40000"/>
+                  </a:schemeClr>
+                </a:solidFill>
+              </a:rPr>
+              <a:t>Step 4: </a:t>
+            </a:r>
+            <a:r>
+              <a:rPr lang="en-US" sz="2400" dirty="0">
+                <a:solidFill>
+                  <a:schemeClr val="accent6">
+                    <a:lumMod val="60000"/>
+                    <a:lumOff val="40000"/>
+                  </a:schemeClr>
+                </a:solidFill>
+              </a:rPr>
+              <a:t>How can I visualize the numeric columns</a:t>
+            </a:r>
+          </a:p>
+          <a:p>
+            <a:r>
+              <a:rPr lang="en-US" sz="2400" b="1" dirty="0">
+                <a:solidFill>
+                  <a:schemeClr val="accent6">
+                    <a:lumMod val="60000"/>
+                    <a:lumOff val="40000"/>
+                  </a:schemeClr>
+                </a:solidFill>
+              </a:rPr>
+              <a:t>Step 5: </a:t>
+            </a:r>
+            <a:r>
+              <a:rPr lang="en-US" sz="2400" dirty="0">
+                <a:solidFill>
+                  <a:schemeClr val="accent6">
+                    <a:lumMod val="60000"/>
+                    <a:lumOff val="40000"/>
+                  </a:schemeClr>
+                </a:solidFill>
+              </a:rPr>
+              <a:t>How do I remove duplicates</a:t>
+            </a:r>
+          </a:p>
+        </p:txBody>
+      </p:sp>
+    </p:spTree>
+    <p:extLst>
+      <p:ext uri="{BB962C8B-B14F-4D97-AF65-F5344CB8AC3E}">
+        <p14:creationId xmlns:p14="http://schemas.microsoft.com/office/powerpoint/2010/main" val="329899479"/>
+      </p:ext>
+    </p:extLst>
+  </p:cSld>
+  <p:clrMapOvr>
+    <a:masterClrMapping/>
+  </p:clrMapOvr>
+</p:sld>
+</file>
+
+<file path=ppt/slides/slide14.xml><?xml version="1.0" encoding="utf-8"?>
+<p:sld xmlns:a="http://schemas.openxmlformats.org/drawingml/2006/main" xmlns:r="http://schemas.openxmlformats.org/officeDocument/2006/relationships" xmlns:p="http://schemas.openxmlformats.org/presentationml/2006/main">
+  <p:cSld>
+    <p:spTree>
+      <p:nvGrpSpPr>
+        <p:cNvPr id="1" name="">
+          <a:extLst>
+            <a:ext uri="{FF2B5EF4-FFF2-40B4-BE49-F238E27FC236}">
               <a16:creationId xmlns:a16="http://schemas.microsoft.com/office/drawing/2014/main" id="{3744BFB2-46E8-B79D-9A58-BFC9CE55FCC2}"/>
             </a:ext>
           </a:extLst>
@@ -4806,7 +5954,7 @@
 </p:sld>
 </file>
 
-<file path=ppt/slides/slide14.xml><?xml version="1.0" encoding="utf-8"?>
+<file path=ppt/slides/slide15.xml><?xml version="1.0" encoding="utf-8"?>
 <p:sld xmlns:a="http://schemas.openxmlformats.org/drawingml/2006/main" xmlns:r="http://schemas.openxmlformats.org/officeDocument/2006/relationships" xmlns:p="http://schemas.openxmlformats.org/presentationml/2006/main">
   <p:cSld>
     <p:spTree>
@@ -4971,7 +6119,7 @@
 </p:sld>
 </file>
 
-<file path=ppt/slides/slide15.xml><?xml version="1.0" encoding="utf-8"?>
+<file path=ppt/slides/slide16.xml><?xml version="1.0" encoding="utf-8"?>
 <p:sld xmlns:a="http://schemas.openxmlformats.org/drawingml/2006/main" xmlns:r="http://schemas.openxmlformats.org/officeDocument/2006/relationships" xmlns:p="http://schemas.openxmlformats.org/presentationml/2006/main">
   <p:cSld>
     <p:spTree>
@@ -5117,7 +6265,7 @@
               <a:t>1)  </a:t>
             </a:r>
             <a:r>
-              <a:rPr lang="en-US" sz="2400" b="1" dirty="0">
+              <a:rPr lang="en-US" sz="2400" b="1" i="1" dirty="0">
                 <a:solidFill>
                   <a:schemeClr val="accent6">
                     <a:lumMod val="60000"/>
@@ -5136,7 +6284,7 @@
                   </a:schemeClr>
                 </a:solidFill>
               </a:rPr>
-              <a:t> I am having a running and high fever. I have rash on my head. What should I do ?</a:t>
+              <a:t> I am having a running nose and high fever. I have rash on my head. What should I do ?</a:t>
             </a:r>
           </a:p>
           <a:p>
@@ -5182,7 +6330,7 @@
               <a:t>2)  </a:t>
             </a:r>
             <a:r>
-              <a:rPr lang="en-US" sz="2400" b="1" dirty="0">
+              <a:rPr lang="en-US" sz="2400" b="1" i="1" dirty="0">
                 <a:solidFill>
                   <a:schemeClr val="accent6">
                     <a:lumMod val="60000"/>
@@ -5229,7 +6377,7 @@
 </p:sld>
 </file>
 
-<file path=ppt/slides/slide16.xml><?xml version="1.0" encoding="utf-8"?>
+<file path=ppt/slides/slide17.xml><?xml version="1.0" encoding="utf-8"?>
 <p:sld xmlns:a="http://schemas.openxmlformats.org/drawingml/2006/main" xmlns:r="http://schemas.openxmlformats.org/officeDocument/2006/relationships" xmlns:p="http://schemas.openxmlformats.org/presentationml/2006/main">
   <p:cSld>
     <p:spTree>
@@ -5449,7 +6597,7 @@
 </p:sld>
 </file>
 
-<file path=ppt/slides/slide17.xml><?xml version="1.0" encoding="utf-8"?>
+<file path=ppt/slides/slide18.xml><?xml version="1.0" encoding="utf-8"?>
 <p:sld xmlns:a="http://schemas.openxmlformats.org/drawingml/2006/main" xmlns:r="http://schemas.openxmlformats.org/officeDocument/2006/relationships" xmlns:p="http://schemas.openxmlformats.org/presentationml/2006/main">
   <p:cSld>
     <p:spTree>
@@ -5685,7 +6833,7 @@
 </p:sld>
 </file>
 
-<file path=ppt/slides/slide18.xml><?xml version="1.0" encoding="utf-8"?>
+<file path=ppt/slides/slide19.xml><?xml version="1.0" encoding="utf-8"?>
 <p:sld xmlns:a="http://schemas.openxmlformats.org/drawingml/2006/main" xmlns:r="http://schemas.openxmlformats.org/officeDocument/2006/relationships" xmlns:p="http://schemas.openxmlformats.org/presentationml/2006/main">
   <p:cSld>
     <p:spTree>
@@ -5969,306 +7117,6 @@
     <p:extLst>
       <p:ext uri="{BB962C8B-B14F-4D97-AF65-F5344CB8AC3E}">
         <p14:creationId xmlns:p14="http://schemas.microsoft.com/office/powerpoint/2010/main" val="813288299"/>
-      </p:ext>
-    </p:extLst>
-  </p:cSld>
-  <p:clrMapOvr>
-    <a:masterClrMapping/>
-  </p:clrMapOvr>
-</p:sld>
-</file>
-
-<file path=ppt/slides/slide19.xml><?xml version="1.0" encoding="utf-8"?>
-<p:sld xmlns:a="http://schemas.openxmlformats.org/drawingml/2006/main" xmlns:r="http://schemas.openxmlformats.org/officeDocument/2006/relationships" xmlns:p="http://schemas.openxmlformats.org/presentationml/2006/main">
-  <p:cSld>
-    <p:spTree>
-      <p:nvGrpSpPr>
-        <p:cNvPr id="1" name="">
-          <a:extLst>
-            <a:ext uri="{FF2B5EF4-FFF2-40B4-BE49-F238E27FC236}">
-              <a16:creationId xmlns:a16="http://schemas.microsoft.com/office/drawing/2014/main" id="{748ED755-196A-D016-8E69-CCCD17E3B2C0}"/>
-            </a:ext>
-          </a:extLst>
-        </p:cNvPr>
-        <p:cNvGrpSpPr/>
-        <p:nvPr/>
-      </p:nvGrpSpPr>
-      <p:grpSpPr>
-        <a:xfrm>
-          <a:off x="0" y="0"/>
-          <a:ext cx="0" cy="0"/>
-          <a:chOff x="0" y="0"/>
-          <a:chExt cx="0" cy="0"/>
-        </a:xfrm>
-      </p:grpSpPr>
-      <p:sp>
-        <p:nvSpPr>
-          <p:cNvPr id="9" name="TextBox 8">
-            <a:extLst>
-              <a:ext uri="{FF2B5EF4-FFF2-40B4-BE49-F238E27FC236}">
-                <a16:creationId xmlns:a16="http://schemas.microsoft.com/office/drawing/2014/main" id="{DCBDEF69-878C-AE3B-E950-6C1686609CE5}"/>
-              </a:ext>
-            </a:extLst>
-          </p:cNvPr>
-          <p:cNvSpPr txBox="1"/>
-          <p:nvPr/>
-        </p:nvSpPr>
-        <p:spPr>
-          <a:xfrm>
-            <a:off x="592087" y="123858"/>
-            <a:ext cx="9859604" cy="523220"/>
-          </a:xfrm>
-          <a:prstGeom prst="rect">
-            <a:avLst/>
-          </a:prstGeom>
-          <a:noFill/>
-        </p:spPr>
-        <p:txBody>
-          <a:bodyPr wrap="square" rtlCol="0">
-            <a:spAutoFit/>
-          </a:bodyPr>
-          <a:lstStyle/>
-          <a:p>
-            <a:pPr algn="ctr"/>
-            <a:r>
-              <a:rPr lang="en-IN" sz="2800" dirty="0">
-                <a:solidFill>
-                  <a:schemeClr val="accent6">
-                    <a:lumMod val="60000"/>
-                    <a:lumOff val="40000"/>
-                  </a:schemeClr>
-                </a:solidFill>
-              </a:rPr>
-              <a:t>The Golden Prompt Formula</a:t>
-            </a:r>
-            <a:endParaRPr lang="en-US" sz="2800" dirty="0">
-              <a:solidFill>
-                <a:schemeClr val="accent6">
-                  <a:lumMod val="60000"/>
-                  <a:lumOff val="40000"/>
-                </a:schemeClr>
-              </a:solidFill>
-            </a:endParaRPr>
-          </a:p>
-        </p:txBody>
-      </p:sp>
-      <p:sp>
-        <p:nvSpPr>
-          <p:cNvPr id="3" name="TextBox 2">
-            <a:extLst>
-              <a:ext uri="{FF2B5EF4-FFF2-40B4-BE49-F238E27FC236}">
-                <a16:creationId xmlns:a16="http://schemas.microsoft.com/office/drawing/2014/main" id="{FD7A18B4-25EE-0E35-77F7-5B0E974A326D}"/>
-              </a:ext>
-            </a:extLst>
-          </p:cNvPr>
-          <p:cNvSpPr txBox="1"/>
-          <p:nvPr/>
-        </p:nvSpPr>
-        <p:spPr>
-          <a:xfrm>
-            <a:off x="334296" y="830109"/>
-            <a:ext cx="10336751" cy="4893647"/>
-          </a:xfrm>
-          <a:prstGeom prst="rect">
-            <a:avLst/>
-          </a:prstGeom>
-          <a:noFill/>
-        </p:spPr>
-        <p:txBody>
-          <a:bodyPr wrap="square">
-            <a:spAutoFit/>
-          </a:bodyPr>
-          <a:lstStyle/>
-          <a:p>
-            <a:r>
-              <a:rPr lang="en-IN" sz="2400" b="1" dirty="0">
-                <a:solidFill>
-                  <a:schemeClr val="accent4">
-                    <a:lumMod val="60000"/>
-                    <a:lumOff val="40000"/>
-                  </a:schemeClr>
-                </a:solidFill>
-              </a:rPr>
-              <a:t>Prompt = Context + Task + Constraint + Output Format</a:t>
-            </a:r>
-          </a:p>
-          <a:p>
-            <a:endParaRPr lang="en-IN" sz="2400" dirty="0">
-              <a:solidFill>
-                <a:schemeClr val="accent6">
-                  <a:lumMod val="60000"/>
-                  <a:lumOff val="40000"/>
-                </a:schemeClr>
-              </a:solidFill>
-            </a:endParaRPr>
-          </a:p>
-          <a:p>
-            <a:r>
-              <a:rPr lang="en-US" sz="2400" b="1" dirty="0">
-                <a:solidFill>
-                  <a:schemeClr val="accent6">
-                    <a:lumMod val="60000"/>
-                    <a:lumOff val="40000"/>
-                  </a:schemeClr>
-                </a:solidFill>
-              </a:rPr>
-              <a:t>The "High Context" Example (The Grounded Response)</a:t>
-            </a:r>
-          </a:p>
-          <a:p>
-            <a:endParaRPr lang="en-US" sz="2400" b="1" dirty="0">
-              <a:solidFill>
-                <a:schemeClr val="accent6">
-                  <a:lumMod val="60000"/>
-                  <a:lumOff val="40000"/>
-                </a:schemeClr>
-              </a:solidFill>
-            </a:endParaRPr>
-          </a:p>
-          <a:p>
-            <a:r>
-              <a:rPr lang="en-US" sz="2400" dirty="0">
-                <a:solidFill>
-                  <a:schemeClr val="accent6">
-                    <a:lumMod val="60000"/>
-                    <a:lumOff val="40000"/>
-                  </a:schemeClr>
-                </a:solidFill>
-              </a:rPr>
-              <a:t>Better Prompt </a:t>
-            </a:r>
-            <a:r>
-              <a:rPr lang="en-US" sz="2400" b="1" dirty="0">
-                <a:solidFill>
-                  <a:schemeClr val="accent6">
-                    <a:lumMod val="60000"/>
-                    <a:lumOff val="40000"/>
-                  </a:schemeClr>
-                </a:solidFill>
-              </a:rPr>
-              <a:t>:</a:t>
-            </a:r>
-            <a:r>
-              <a:rPr lang="en-US" sz="2400" dirty="0">
-                <a:solidFill>
-                  <a:schemeClr val="accent6">
-                    <a:lumMod val="60000"/>
-                    <a:lumOff val="40000"/>
-                  </a:schemeClr>
-                </a:solidFill>
-              </a:rPr>
-              <a:t> </a:t>
-            </a:r>
-          </a:p>
-          <a:p>
-            <a:r>
-              <a:rPr lang="en-US" sz="2400" dirty="0">
-                <a:solidFill>
-                  <a:schemeClr val="accent6">
-                    <a:lumMod val="60000"/>
-                    <a:lumOff val="40000"/>
-                  </a:schemeClr>
-                </a:solidFill>
-              </a:rPr>
-              <a:t>"</a:t>
-            </a:r>
-            <a:r>
-              <a:rPr lang="en-US" sz="2400" b="1" dirty="0">
-                <a:solidFill>
-                  <a:schemeClr val="accent6">
-                    <a:lumMod val="60000"/>
-                    <a:lumOff val="40000"/>
-                  </a:schemeClr>
-                </a:solidFill>
-              </a:rPr>
-              <a:t>[Background]:</a:t>
-            </a:r>
-            <a:r>
-              <a:rPr lang="en-US" sz="2400" dirty="0">
-                <a:solidFill>
-                  <a:schemeClr val="accent6">
-                    <a:lumMod val="60000"/>
-                    <a:lumOff val="40000"/>
-                  </a:schemeClr>
-                </a:solidFill>
-              </a:rPr>
-              <a:t> We are a mid-sized B2B software company that sells a project management tool to construction firms. Our subscription is $500/month.</a:t>
-            </a:r>
-          </a:p>
-          <a:p>
-            <a:endParaRPr lang="en-US" sz="2400" dirty="0">
-              <a:solidFill>
-                <a:schemeClr val="accent6">
-                  <a:lumMod val="60000"/>
-                  <a:lumOff val="40000"/>
-                </a:schemeClr>
-              </a:solidFill>
-            </a:endParaRPr>
-          </a:p>
-          <a:p>
-            <a:r>
-              <a:rPr lang="en-US" sz="2400" b="1" dirty="0">
-                <a:solidFill>
-                  <a:schemeClr val="accent6">
-                    <a:lumMod val="60000"/>
-                    <a:lumOff val="40000"/>
-                  </a:schemeClr>
-                </a:solidFill>
-              </a:rPr>
-              <a:t>[The Situation]:</a:t>
-            </a:r>
-            <a:r>
-              <a:rPr lang="en-US" sz="2400" dirty="0">
-                <a:solidFill>
-                  <a:schemeClr val="accent6">
-                    <a:lumMod val="60000"/>
-                    <a:lumOff val="40000"/>
-                  </a:schemeClr>
-                </a:solidFill>
-              </a:rPr>
-              <a:t> We’ve noticed that customers usually leave (churn) after the 3rd month because the software feels too complex for their field workers.</a:t>
-            </a:r>
-          </a:p>
-          <a:p>
-            <a:endParaRPr lang="en-US" sz="2400" dirty="0">
-              <a:solidFill>
-                <a:schemeClr val="accent6">
-                  <a:lumMod val="60000"/>
-                  <a:lumOff val="40000"/>
-                </a:schemeClr>
-              </a:solidFill>
-            </a:endParaRPr>
-          </a:p>
-          <a:p>
-            <a:r>
-              <a:rPr lang="en-US" sz="2400" b="1" dirty="0">
-                <a:solidFill>
-                  <a:schemeClr val="accent6">
-                    <a:lumMod val="60000"/>
-                    <a:lumOff val="40000"/>
-                  </a:schemeClr>
-                </a:solidFill>
-              </a:rPr>
-              <a:t>[Goal]:</a:t>
-            </a:r>
-            <a:r>
-              <a:rPr lang="en-US" sz="2400" dirty="0">
-                <a:solidFill>
-                  <a:schemeClr val="accent6">
-                    <a:lumMod val="60000"/>
-                    <a:lumOff val="40000"/>
-                  </a:schemeClr>
-                </a:solidFill>
-              </a:rPr>
-              <a:t> Create a 30-day retention plan specifically focused on simplifying the 'onboarding' phase for non-technical users."</a:t>
-            </a:r>
-          </a:p>
-        </p:txBody>
-      </p:sp>
-    </p:spTree>
-    <p:extLst>
-      <p:ext uri="{BB962C8B-B14F-4D97-AF65-F5344CB8AC3E}">
-        <p14:creationId xmlns:p14="http://schemas.microsoft.com/office/powerpoint/2010/main" val="1629387032"/>
       </p:ext>
     </p:extLst>
   </p:cSld>
@@ -6330,15 +7178,26 @@
           <a:lstStyle/>
           <a:p>
             <a:r>
-              <a:rPr lang="en-US" sz="2400" dirty="0">
-                <a:solidFill>
-                  <a:schemeClr val="accent6">
-                    <a:lumMod val="60000"/>
-                    <a:lumOff val="40000"/>
-                  </a:schemeClr>
-                </a:solidFill>
-              </a:rPr>
-              <a:t>Tokenization – Why AI Sees Numbers, Not Words</a:t>
+              <a:rPr lang="en-US" sz="2400" b="1" dirty="0">
+                <a:solidFill>
+                  <a:schemeClr val="accent6">
+                    <a:lumMod val="60000"/>
+                    <a:lumOff val="40000"/>
+                  </a:schemeClr>
+                </a:solidFill>
+              </a:rPr>
+              <a:t>Tokenization</a:t>
+            </a:r>
+            <a:r>
+              <a:rPr lang="en-US" sz="2400" dirty="0">
+                <a:solidFill>
+                  <a:schemeClr val="accent6">
+                    <a:lumMod val="60000"/>
+                    <a:lumOff val="40000"/>
+                  </a:schemeClr>
+                </a:solidFill>
+              </a:rPr>
+              <a:t> – Why AI Sees Numbers, Not Words</a:t>
             </a:r>
           </a:p>
           <a:p>
@@ -6576,6 +7435,306 @@
 </file>
 
 <file path=ppt/slides/slide20.xml><?xml version="1.0" encoding="utf-8"?>
+<p:sld xmlns:a="http://schemas.openxmlformats.org/drawingml/2006/main" xmlns:r="http://schemas.openxmlformats.org/officeDocument/2006/relationships" xmlns:p="http://schemas.openxmlformats.org/presentationml/2006/main">
+  <p:cSld>
+    <p:spTree>
+      <p:nvGrpSpPr>
+        <p:cNvPr id="1" name="">
+          <a:extLst>
+            <a:ext uri="{FF2B5EF4-FFF2-40B4-BE49-F238E27FC236}">
+              <a16:creationId xmlns:a16="http://schemas.microsoft.com/office/drawing/2014/main" id="{748ED755-196A-D016-8E69-CCCD17E3B2C0}"/>
+            </a:ext>
+          </a:extLst>
+        </p:cNvPr>
+        <p:cNvGrpSpPr/>
+        <p:nvPr/>
+      </p:nvGrpSpPr>
+      <p:grpSpPr>
+        <a:xfrm>
+          <a:off x="0" y="0"/>
+          <a:ext cx="0" cy="0"/>
+          <a:chOff x="0" y="0"/>
+          <a:chExt cx="0" cy="0"/>
+        </a:xfrm>
+      </p:grpSpPr>
+      <p:sp>
+        <p:nvSpPr>
+          <p:cNvPr id="9" name="TextBox 8">
+            <a:extLst>
+              <a:ext uri="{FF2B5EF4-FFF2-40B4-BE49-F238E27FC236}">
+                <a16:creationId xmlns:a16="http://schemas.microsoft.com/office/drawing/2014/main" id="{DCBDEF69-878C-AE3B-E950-6C1686609CE5}"/>
+              </a:ext>
+            </a:extLst>
+          </p:cNvPr>
+          <p:cNvSpPr txBox="1"/>
+          <p:nvPr/>
+        </p:nvSpPr>
+        <p:spPr>
+          <a:xfrm>
+            <a:off x="592087" y="123858"/>
+            <a:ext cx="9859604" cy="523220"/>
+          </a:xfrm>
+          <a:prstGeom prst="rect">
+            <a:avLst/>
+          </a:prstGeom>
+          <a:noFill/>
+        </p:spPr>
+        <p:txBody>
+          <a:bodyPr wrap="square" rtlCol="0">
+            <a:spAutoFit/>
+          </a:bodyPr>
+          <a:lstStyle/>
+          <a:p>
+            <a:pPr algn="ctr"/>
+            <a:r>
+              <a:rPr lang="en-IN" sz="2800" dirty="0">
+                <a:solidFill>
+                  <a:schemeClr val="accent6">
+                    <a:lumMod val="60000"/>
+                    <a:lumOff val="40000"/>
+                  </a:schemeClr>
+                </a:solidFill>
+              </a:rPr>
+              <a:t>The Golden Prompt Formula</a:t>
+            </a:r>
+            <a:endParaRPr lang="en-US" sz="2800" dirty="0">
+              <a:solidFill>
+                <a:schemeClr val="accent6">
+                  <a:lumMod val="60000"/>
+                  <a:lumOff val="40000"/>
+                </a:schemeClr>
+              </a:solidFill>
+            </a:endParaRPr>
+          </a:p>
+        </p:txBody>
+      </p:sp>
+      <p:sp>
+        <p:nvSpPr>
+          <p:cNvPr id="3" name="TextBox 2">
+            <a:extLst>
+              <a:ext uri="{FF2B5EF4-FFF2-40B4-BE49-F238E27FC236}">
+                <a16:creationId xmlns:a16="http://schemas.microsoft.com/office/drawing/2014/main" id="{FD7A18B4-25EE-0E35-77F7-5B0E974A326D}"/>
+              </a:ext>
+            </a:extLst>
+          </p:cNvPr>
+          <p:cNvSpPr txBox="1"/>
+          <p:nvPr/>
+        </p:nvSpPr>
+        <p:spPr>
+          <a:xfrm>
+            <a:off x="334296" y="830109"/>
+            <a:ext cx="10336751" cy="4893647"/>
+          </a:xfrm>
+          <a:prstGeom prst="rect">
+            <a:avLst/>
+          </a:prstGeom>
+          <a:noFill/>
+        </p:spPr>
+        <p:txBody>
+          <a:bodyPr wrap="square">
+            <a:spAutoFit/>
+          </a:bodyPr>
+          <a:lstStyle/>
+          <a:p>
+            <a:r>
+              <a:rPr lang="en-IN" sz="2400" b="1" dirty="0">
+                <a:solidFill>
+                  <a:schemeClr val="accent4">
+                    <a:lumMod val="60000"/>
+                    <a:lumOff val="40000"/>
+                  </a:schemeClr>
+                </a:solidFill>
+              </a:rPr>
+              <a:t>Prompt = Context + Task + Constraint + Output Format</a:t>
+            </a:r>
+          </a:p>
+          <a:p>
+            <a:endParaRPr lang="en-IN" sz="2400" dirty="0">
+              <a:solidFill>
+                <a:schemeClr val="accent6">
+                  <a:lumMod val="60000"/>
+                  <a:lumOff val="40000"/>
+                </a:schemeClr>
+              </a:solidFill>
+            </a:endParaRPr>
+          </a:p>
+          <a:p>
+            <a:r>
+              <a:rPr lang="en-US" sz="2400" b="1" dirty="0">
+                <a:solidFill>
+                  <a:schemeClr val="accent6">
+                    <a:lumMod val="60000"/>
+                    <a:lumOff val="40000"/>
+                  </a:schemeClr>
+                </a:solidFill>
+              </a:rPr>
+              <a:t>The "High Context" Example (The Grounded Response)</a:t>
+            </a:r>
+          </a:p>
+          <a:p>
+            <a:endParaRPr lang="en-US" sz="2400" b="1" dirty="0">
+              <a:solidFill>
+                <a:schemeClr val="accent6">
+                  <a:lumMod val="60000"/>
+                  <a:lumOff val="40000"/>
+                </a:schemeClr>
+              </a:solidFill>
+            </a:endParaRPr>
+          </a:p>
+          <a:p>
+            <a:r>
+              <a:rPr lang="en-US" sz="2400" dirty="0">
+                <a:solidFill>
+                  <a:schemeClr val="accent6">
+                    <a:lumMod val="60000"/>
+                    <a:lumOff val="40000"/>
+                  </a:schemeClr>
+                </a:solidFill>
+              </a:rPr>
+              <a:t>Better Prompt </a:t>
+            </a:r>
+            <a:r>
+              <a:rPr lang="en-US" sz="2400" b="1" dirty="0">
+                <a:solidFill>
+                  <a:schemeClr val="accent6">
+                    <a:lumMod val="60000"/>
+                    <a:lumOff val="40000"/>
+                  </a:schemeClr>
+                </a:solidFill>
+              </a:rPr>
+              <a:t>:</a:t>
+            </a:r>
+            <a:r>
+              <a:rPr lang="en-US" sz="2400" dirty="0">
+                <a:solidFill>
+                  <a:schemeClr val="accent6">
+                    <a:lumMod val="60000"/>
+                    <a:lumOff val="40000"/>
+                  </a:schemeClr>
+                </a:solidFill>
+              </a:rPr>
+              <a:t> </a:t>
+            </a:r>
+          </a:p>
+          <a:p>
+            <a:r>
+              <a:rPr lang="en-US" sz="2400" dirty="0">
+                <a:solidFill>
+                  <a:schemeClr val="accent6">
+                    <a:lumMod val="60000"/>
+                    <a:lumOff val="40000"/>
+                  </a:schemeClr>
+                </a:solidFill>
+              </a:rPr>
+              <a:t>"</a:t>
+            </a:r>
+            <a:r>
+              <a:rPr lang="en-US" sz="2400" b="1" dirty="0">
+                <a:solidFill>
+                  <a:schemeClr val="accent6">
+                    <a:lumMod val="60000"/>
+                    <a:lumOff val="40000"/>
+                  </a:schemeClr>
+                </a:solidFill>
+              </a:rPr>
+              <a:t>[Background]:</a:t>
+            </a:r>
+            <a:r>
+              <a:rPr lang="en-US" sz="2400" dirty="0">
+                <a:solidFill>
+                  <a:schemeClr val="accent6">
+                    <a:lumMod val="60000"/>
+                    <a:lumOff val="40000"/>
+                  </a:schemeClr>
+                </a:solidFill>
+              </a:rPr>
+              <a:t> We are a mid-sized B2B software company that sells a project management tool to construction firms. Our subscription is $500/month.</a:t>
+            </a:r>
+          </a:p>
+          <a:p>
+            <a:endParaRPr lang="en-US" sz="2400" dirty="0">
+              <a:solidFill>
+                <a:schemeClr val="accent6">
+                  <a:lumMod val="60000"/>
+                  <a:lumOff val="40000"/>
+                </a:schemeClr>
+              </a:solidFill>
+            </a:endParaRPr>
+          </a:p>
+          <a:p>
+            <a:r>
+              <a:rPr lang="en-US" sz="2400" b="1" dirty="0">
+                <a:solidFill>
+                  <a:schemeClr val="accent6">
+                    <a:lumMod val="60000"/>
+                    <a:lumOff val="40000"/>
+                  </a:schemeClr>
+                </a:solidFill>
+              </a:rPr>
+              <a:t>[The Situation]:</a:t>
+            </a:r>
+            <a:r>
+              <a:rPr lang="en-US" sz="2400" dirty="0">
+                <a:solidFill>
+                  <a:schemeClr val="accent6">
+                    <a:lumMod val="60000"/>
+                    <a:lumOff val="40000"/>
+                  </a:schemeClr>
+                </a:solidFill>
+              </a:rPr>
+              <a:t> We’ve noticed that customers usually leave (churn) after the 3rd month because the software feels too complex for their field workers.</a:t>
+            </a:r>
+          </a:p>
+          <a:p>
+            <a:endParaRPr lang="en-US" sz="2400" dirty="0">
+              <a:solidFill>
+                <a:schemeClr val="accent6">
+                  <a:lumMod val="60000"/>
+                  <a:lumOff val="40000"/>
+                </a:schemeClr>
+              </a:solidFill>
+            </a:endParaRPr>
+          </a:p>
+          <a:p>
+            <a:r>
+              <a:rPr lang="en-US" sz="2400" b="1" dirty="0">
+                <a:solidFill>
+                  <a:schemeClr val="accent6">
+                    <a:lumMod val="60000"/>
+                    <a:lumOff val="40000"/>
+                  </a:schemeClr>
+                </a:solidFill>
+              </a:rPr>
+              <a:t>[Goal]:</a:t>
+            </a:r>
+            <a:r>
+              <a:rPr lang="en-US" sz="2400" dirty="0">
+                <a:solidFill>
+                  <a:schemeClr val="accent6">
+                    <a:lumMod val="60000"/>
+                    <a:lumOff val="40000"/>
+                  </a:schemeClr>
+                </a:solidFill>
+              </a:rPr>
+              <a:t> Create a 30-day retention plan specifically focused on simplifying the 'onboarding' phase for non-technical users."</a:t>
+            </a:r>
+          </a:p>
+        </p:txBody>
+      </p:sp>
+    </p:spTree>
+    <p:extLst>
+      <p:ext uri="{BB962C8B-B14F-4D97-AF65-F5344CB8AC3E}">
+        <p14:creationId xmlns:p14="http://schemas.microsoft.com/office/powerpoint/2010/main" val="1629387032"/>
+      </p:ext>
+    </p:extLst>
+  </p:cSld>
+  <p:clrMapOvr>
+    <a:masterClrMapping/>
+  </p:clrMapOvr>
+</p:sld>
+</file>
+
+<file path=ppt/slides/slide21.xml><?xml version="1.0" encoding="utf-8"?>
 <p:sld xmlns:a="http://schemas.openxmlformats.org/drawingml/2006/main" xmlns:r="http://schemas.openxmlformats.org/officeDocument/2006/relationships" xmlns:p="http://schemas.openxmlformats.org/presentationml/2006/main">
   <p:cSld>
     <p:spTree>
@@ -6745,7 +7904,20 @@
                   </a:schemeClr>
                 </a:solidFill>
               </a:rPr>
-              <a:t>Example: Analyze the dataset and find trends in sales from the column </a:t>
+              <a:t>Example: </a:t>
+            </a:r>
+          </a:p>
+          <a:p>
+            <a:r>
+              <a:rPr lang="en-US" sz="2400" dirty="0">
+                <a:solidFill>
+                  <a:schemeClr val="accent6">
+                    <a:lumMod val="60000"/>
+                    <a:lumOff val="40000"/>
+                  </a:schemeClr>
+                </a:solidFill>
+              </a:rPr>
+              <a:t>Analyze the dataset and find trends in sales from the column </a:t>
             </a:r>
             <a:r>
               <a:rPr lang="en-US" sz="2400" dirty="0" err="1">
@@ -6769,16 +7941,6 @@
               </a:rPr>
               <a:t>.</a:t>
             </a:r>
-          </a:p>
-          <a:p>
-            <a:endParaRPr lang="en-IN" sz="2400" dirty="0">
-              <a:solidFill>
-                <a:schemeClr val="accent6">
-                  <a:lumMod val="60000"/>
-                  <a:lumOff val="40000"/>
-                </a:schemeClr>
-              </a:solidFill>
-            </a:endParaRPr>
           </a:p>
         </p:txBody>
       </p:sp>
@@ -6795,7 +7957,7 @@
 </p:sld>
 </file>
 
-<file path=ppt/slides/slide21.xml><?xml version="1.0" encoding="utf-8"?>
+<file path=ppt/slides/slide22.xml><?xml version="1.0" encoding="utf-8"?>
 <p:sld xmlns:a="http://schemas.openxmlformats.org/drawingml/2006/main" xmlns:r="http://schemas.openxmlformats.org/officeDocument/2006/relationships" xmlns:p="http://schemas.openxmlformats.org/presentationml/2006/main">
   <p:cSld>
     <p:spTree>
@@ -6884,7 +8046,7 @@
         <p:spPr>
           <a:xfrm>
             <a:off x="334296" y="766101"/>
-            <a:ext cx="9859603" cy="5632311"/>
+            <a:ext cx="9859603" cy="6001643"/>
           </a:xfrm>
           <a:prstGeom prst="rect">
             <a:avLst/>
@@ -7073,7 +8235,31 @@
                   </a:schemeClr>
                 </a:solidFill>
               </a:rPr>
-              <a:t>Example: Explain in simple language </a:t>
+              <a:t>Example: </a:t>
+            </a:r>
+          </a:p>
+          <a:p>
+            <a:r>
+              <a:rPr lang="en-US" sz="2400" dirty="0">
+                <a:solidFill>
+                  <a:schemeClr val="accent6">
+                    <a:lumMod val="60000"/>
+                    <a:lumOff val="40000"/>
+                  </a:schemeClr>
+                </a:solidFill>
+              </a:rPr>
+              <a:t>Explain in </a:t>
+            </a:r>
+            <a:r>
+              <a:rPr lang="en-US" sz="2400" b="1" i="1" dirty="0">
+                <a:solidFill>
+                  <a:schemeClr val="accent6">
+                    <a:lumMod val="60000"/>
+                    <a:lumOff val="40000"/>
+                  </a:schemeClr>
+                </a:solidFill>
+              </a:rPr>
+              <a:t>simple language under 150 words</a:t>
             </a:r>
             <a:r>
               <a:rPr lang="en-US" sz="2400" b="1" dirty="0">
@@ -7084,7 +8270,7 @@
                   </a:schemeClr>
                 </a:solidFill>
               </a:rPr>
-              <a:t>under 150 words </a:t>
+              <a:t> </a:t>
             </a:r>
             <a:r>
               <a:rPr lang="en-US" sz="2400" dirty="0">
@@ -7098,6 +8284,17 @@
               <a:t>the concept of calculus. My audience is </a:t>
             </a:r>
             <a:r>
+              <a:rPr lang="en-US" sz="2400" b="1" i="1" dirty="0">
+                <a:solidFill>
+                  <a:schemeClr val="accent6">
+                    <a:lumMod val="60000"/>
+                    <a:lumOff val="40000"/>
+                  </a:schemeClr>
+                </a:solidFill>
+              </a:rPr>
+              <a:t>high school students</a:t>
+            </a:r>
+            <a:r>
               <a:rPr lang="en-US" sz="2400" b="1" dirty="0">
                 <a:solidFill>
                   <a:schemeClr val="accent6">
@@ -7106,43 +8303,21 @@
                   </a:schemeClr>
                 </a:solidFill>
               </a:rPr>
-              <a:t>high school students </a:t>
-            </a:r>
-            <a:r>
-              <a:rPr lang="en-US" sz="2400" dirty="0">
-                <a:solidFill>
-                  <a:schemeClr val="accent6">
-                    <a:lumMod val="60000"/>
-                    <a:lumOff val="40000"/>
-                  </a:schemeClr>
-                </a:solidFill>
-              </a:rPr>
-              <a:t>with </a:t>
-            </a:r>
-            <a:r>
-              <a:rPr lang="en-US" sz="2400" b="1" dirty="0">
-                <a:solidFill>
-                  <a:schemeClr val="accent6">
-                    <a:lumMod val="60000"/>
-                    <a:lumOff val="40000"/>
-                  </a:schemeClr>
-                </a:solidFill>
-              </a:rPr>
-              <a:t>weak math background</a:t>
-            </a:r>
-            <a:r>
-              <a:rPr lang="en-US" sz="2400" dirty="0">
-                <a:solidFill>
-                  <a:schemeClr val="accent6">
-                    <a:lumMod val="60000"/>
-                    <a:lumOff val="40000"/>
-                  </a:schemeClr>
-                </a:solidFill>
-              </a:rPr>
-              <a:t>. </a:t>
-            </a:r>
-            <a:r>
-              <a:rPr lang="en-US" sz="2400" b="1" dirty="0">
+              <a:t> </a:t>
+            </a:r>
+            <a:r>
+              <a:rPr lang="en-US" sz="2400" dirty="0">
+                <a:solidFill>
+                  <a:schemeClr val="accent6">
+                    <a:lumMod val="60000"/>
+                    <a:lumOff val="40000"/>
+                  </a:schemeClr>
+                </a:solidFill>
+              </a:rPr>
+              <a:t>with weak math background. </a:t>
+            </a:r>
+            <a:r>
+              <a:rPr lang="en-US" sz="2400" b="1" i="1" dirty="0">
                 <a:solidFill>
                   <a:schemeClr val="accent6">
                     <a:lumMod val="60000"/>
@@ -7168,7 +8343,7 @@
 </p:sld>
 </file>
 
-<file path=ppt/slides/slide22.xml><?xml version="1.0" encoding="utf-8"?>
+<file path=ppt/slides/slide23.xml><?xml version="1.0" encoding="utf-8"?>
 <p:sld xmlns:a="http://schemas.openxmlformats.org/drawingml/2006/main" xmlns:r="http://schemas.openxmlformats.org/officeDocument/2006/relationships" xmlns:p="http://schemas.openxmlformats.org/presentationml/2006/main">
   <p:cSld>
     <p:spTree>
@@ -7257,7 +8432,7 @@
         <p:spPr>
           <a:xfrm>
             <a:off x="334297" y="811821"/>
-            <a:ext cx="8863780" cy="4893647"/>
+            <a:ext cx="7423355" cy="4154984"/>
           </a:xfrm>
           <a:prstGeom prst="rect">
             <a:avLst/>
@@ -7338,7 +8513,7 @@
                   </a:schemeClr>
                 </a:solidFill>
               </a:rPr>
-              <a:t>Examples:</a:t>
+              <a:t>Output format examples:</a:t>
             </a:r>
           </a:p>
           <a:p>
@@ -7424,29 +8599,6 @@
                 </a:solidFill>
               </a:rPr>
               <a:t>Step-by-step guide</a:t>
-            </a:r>
-          </a:p>
-          <a:p>
-            <a:endParaRPr lang="en-US" sz="2400" dirty="0">
-              <a:solidFill>
-                <a:schemeClr val="accent6">
-                  <a:lumMod val="60000"/>
-                  <a:lumOff val="40000"/>
-                </a:schemeClr>
-              </a:solidFill>
-            </a:endParaRPr>
-          </a:p>
-          <a:p>
-            <a:r>
-              <a:rPr lang="en-US" sz="2400" dirty="0">
-                <a:solidFill>
-                  <a:schemeClr val="accent6">
-                    <a:lumMod val="60000"/>
-                    <a:lumOff val="40000"/>
-                  </a:schemeClr>
-                </a:solidFill>
-              </a:rPr>
-              <a:t>Example: Provide output in table format.</a:t>
             </a:r>
           </a:p>
         </p:txBody>
@@ -7464,7 +8616,395 @@
 </p:sld>
 </file>
 
-<file path=ppt/slides/slide23.xml><?xml version="1.0" encoding="utf-8"?>
+<file path=ppt/slides/slide24.xml><?xml version="1.0" encoding="utf-8"?>
+<p:sld xmlns:a="http://schemas.openxmlformats.org/drawingml/2006/main" xmlns:r="http://schemas.openxmlformats.org/officeDocument/2006/relationships" xmlns:p="http://schemas.openxmlformats.org/presentationml/2006/main">
+  <p:cSld>
+    <p:spTree>
+      <p:nvGrpSpPr>
+        <p:cNvPr id="1" name="">
+          <a:extLst>
+            <a:ext uri="{FF2B5EF4-FFF2-40B4-BE49-F238E27FC236}">
+              <a16:creationId xmlns:a16="http://schemas.microsoft.com/office/drawing/2014/main" id="{602DC570-E0A4-B9C5-988A-7FC8B36737CC}"/>
+            </a:ext>
+          </a:extLst>
+        </p:cNvPr>
+        <p:cNvGrpSpPr/>
+        <p:nvPr/>
+      </p:nvGrpSpPr>
+      <p:grpSpPr>
+        <a:xfrm>
+          <a:off x="0" y="0"/>
+          <a:ext cx="0" cy="0"/>
+          <a:chOff x="0" y="0"/>
+          <a:chExt cx="0" cy="0"/>
+        </a:xfrm>
+      </p:grpSpPr>
+      <p:sp>
+        <p:nvSpPr>
+          <p:cNvPr id="9" name="TextBox 8">
+            <a:extLst>
+              <a:ext uri="{FF2B5EF4-FFF2-40B4-BE49-F238E27FC236}">
+                <a16:creationId xmlns:a16="http://schemas.microsoft.com/office/drawing/2014/main" id="{42CD7745-5608-5569-FDDD-A46EA0CF672E}"/>
+              </a:ext>
+            </a:extLst>
+          </p:cNvPr>
+          <p:cNvSpPr txBox="1"/>
+          <p:nvPr/>
+        </p:nvSpPr>
+        <p:spPr>
+          <a:xfrm>
+            <a:off x="592087" y="123858"/>
+            <a:ext cx="9859604" cy="523220"/>
+          </a:xfrm>
+          <a:prstGeom prst="rect">
+            <a:avLst/>
+          </a:prstGeom>
+          <a:noFill/>
+        </p:spPr>
+        <p:txBody>
+          <a:bodyPr wrap="square" rtlCol="0">
+            <a:spAutoFit/>
+          </a:bodyPr>
+          <a:lstStyle/>
+          <a:p>
+            <a:pPr algn="ctr"/>
+            <a:r>
+              <a:rPr lang="en-IN" sz="2800" dirty="0">
+                <a:solidFill>
+                  <a:schemeClr val="accent6">
+                    <a:lumMod val="60000"/>
+                    <a:lumOff val="40000"/>
+                  </a:schemeClr>
+                </a:solidFill>
+              </a:rPr>
+              <a:t>The Golden Prompt Formula</a:t>
+            </a:r>
+            <a:endParaRPr lang="en-US" sz="2800" dirty="0">
+              <a:solidFill>
+                <a:schemeClr val="accent6">
+                  <a:lumMod val="60000"/>
+                  <a:lumOff val="40000"/>
+                </a:schemeClr>
+              </a:solidFill>
+            </a:endParaRPr>
+          </a:p>
+        </p:txBody>
+      </p:sp>
+      <p:pic>
+        <p:nvPicPr>
+          <p:cNvPr id="4" name="Picture 3">
+            <a:extLst>
+              <a:ext uri="{FF2B5EF4-FFF2-40B4-BE49-F238E27FC236}">
+                <a16:creationId xmlns:a16="http://schemas.microsoft.com/office/drawing/2014/main" id="{E6F581D1-28DA-28B5-FFEB-DB6C8CF6619B}"/>
+              </a:ext>
+            </a:extLst>
+          </p:cNvPr>
+          <p:cNvPicPr>
+            <a:picLocks noChangeAspect="1"/>
+          </p:cNvPicPr>
+          <p:nvPr/>
+        </p:nvPicPr>
+        <p:blipFill>
+          <a:blip r:embed="rId3"/>
+          <a:stretch>
+            <a:fillRect/>
+          </a:stretch>
+        </p:blipFill>
+        <p:spPr>
+          <a:xfrm>
+            <a:off x="1200913" y="3104883"/>
+            <a:ext cx="8917158" cy="2637155"/>
+          </a:xfrm>
+          <a:prstGeom prst="rect">
+            <a:avLst/>
+          </a:prstGeom>
+        </p:spPr>
+      </p:pic>
+      <p:sp>
+        <p:nvSpPr>
+          <p:cNvPr id="6" name="TextBox 5">
+            <a:extLst>
+              <a:ext uri="{FF2B5EF4-FFF2-40B4-BE49-F238E27FC236}">
+                <a16:creationId xmlns:a16="http://schemas.microsoft.com/office/drawing/2014/main" id="{FFFC0898-4A59-3995-001A-ED66D933E0DB}"/>
+              </a:ext>
+            </a:extLst>
+          </p:cNvPr>
+          <p:cNvSpPr txBox="1"/>
+          <p:nvPr/>
+        </p:nvSpPr>
+        <p:spPr>
+          <a:xfrm>
+            <a:off x="522487" y="985427"/>
+            <a:ext cx="9358932" cy="1200329"/>
+          </a:xfrm>
+          <a:prstGeom prst="rect">
+            <a:avLst/>
+          </a:prstGeom>
+          <a:noFill/>
+        </p:spPr>
+        <p:txBody>
+          <a:bodyPr wrap="square">
+            <a:spAutoFit/>
+          </a:bodyPr>
+          <a:lstStyle/>
+          <a:p>
+            <a:r>
+              <a:rPr lang="en-US" sz="2400" dirty="0">
+                <a:solidFill>
+                  <a:schemeClr val="accent6">
+                    <a:lumMod val="60000"/>
+                    <a:lumOff val="40000"/>
+                  </a:schemeClr>
+                </a:solidFill>
+              </a:rPr>
+              <a:t>Example: </a:t>
+            </a:r>
+          </a:p>
+          <a:p>
+            <a:r>
+              <a:rPr lang="en-US" sz="2400" dirty="0">
+                <a:solidFill>
+                  <a:schemeClr val="accent6">
+                    <a:lumMod val="60000"/>
+                    <a:lumOff val="40000"/>
+                  </a:schemeClr>
+                </a:solidFill>
+              </a:rPr>
+              <a:t>Tell me the 3 difference between regular data and time series data. Provide output in </a:t>
+            </a:r>
+            <a:r>
+              <a:rPr lang="en-US" sz="2400" b="1" i="1" dirty="0">
+                <a:solidFill>
+                  <a:schemeClr val="accent6">
+                    <a:lumMod val="60000"/>
+                    <a:lumOff val="40000"/>
+                  </a:schemeClr>
+                </a:solidFill>
+              </a:rPr>
+              <a:t>table format</a:t>
+            </a:r>
+            <a:r>
+              <a:rPr lang="en-US" sz="2400" dirty="0">
+                <a:solidFill>
+                  <a:schemeClr val="accent6">
+                    <a:lumMod val="60000"/>
+                    <a:lumOff val="40000"/>
+                  </a:schemeClr>
+                </a:solidFill>
+              </a:rPr>
+              <a:t>.</a:t>
+            </a:r>
+          </a:p>
+        </p:txBody>
+      </p:sp>
+    </p:spTree>
+    <p:extLst>
+      <p:ext uri="{BB962C8B-B14F-4D97-AF65-F5344CB8AC3E}">
+        <p14:creationId xmlns:p14="http://schemas.microsoft.com/office/powerpoint/2010/main" val="3378689541"/>
+      </p:ext>
+    </p:extLst>
+  </p:cSld>
+  <p:clrMapOvr>
+    <a:masterClrMapping/>
+  </p:clrMapOvr>
+</p:sld>
+</file>
+
+<file path=ppt/slides/slide25.xml><?xml version="1.0" encoding="utf-8"?>
+<p:sld xmlns:a="http://schemas.openxmlformats.org/drawingml/2006/main" xmlns:r="http://schemas.openxmlformats.org/officeDocument/2006/relationships" xmlns:p="http://schemas.openxmlformats.org/presentationml/2006/main">
+  <p:cSld>
+    <p:spTree>
+      <p:nvGrpSpPr>
+        <p:cNvPr id="1" name="">
+          <a:extLst>
+            <a:ext uri="{FF2B5EF4-FFF2-40B4-BE49-F238E27FC236}">
+              <a16:creationId xmlns:a16="http://schemas.microsoft.com/office/drawing/2014/main" id="{99BDFC16-BBA0-79DD-C2FC-9366F81DDA81}"/>
+            </a:ext>
+          </a:extLst>
+        </p:cNvPr>
+        <p:cNvGrpSpPr/>
+        <p:nvPr/>
+      </p:nvGrpSpPr>
+      <p:grpSpPr>
+        <a:xfrm>
+          <a:off x="0" y="0"/>
+          <a:ext cx="0" cy="0"/>
+          <a:chOff x="0" y="0"/>
+          <a:chExt cx="0" cy="0"/>
+        </a:xfrm>
+      </p:grpSpPr>
+      <p:sp>
+        <p:nvSpPr>
+          <p:cNvPr id="9" name="TextBox 8">
+            <a:extLst>
+              <a:ext uri="{FF2B5EF4-FFF2-40B4-BE49-F238E27FC236}">
+                <a16:creationId xmlns:a16="http://schemas.microsoft.com/office/drawing/2014/main" id="{06287935-100C-6EFD-8B11-DF4E66C594D9}"/>
+              </a:ext>
+            </a:extLst>
+          </p:cNvPr>
+          <p:cNvSpPr txBox="1"/>
+          <p:nvPr/>
+        </p:nvSpPr>
+        <p:spPr>
+          <a:xfrm>
+            <a:off x="592087" y="123858"/>
+            <a:ext cx="9859604" cy="523220"/>
+          </a:xfrm>
+          <a:prstGeom prst="rect">
+            <a:avLst/>
+          </a:prstGeom>
+          <a:noFill/>
+        </p:spPr>
+        <p:txBody>
+          <a:bodyPr wrap="square" rtlCol="0">
+            <a:spAutoFit/>
+          </a:bodyPr>
+          <a:lstStyle/>
+          <a:p>
+            <a:pPr algn="ctr"/>
+            <a:r>
+              <a:rPr lang="en-IN" sz="2800" dirty="0">
+                <a:solidFill>
+                  <a:schemeClr val="accent6">
+                    <a:lumMod val="60000"/>
+                    <a:lumOff val="40000"/>
+                  </a:schemeClr>
+                </a:solidFill>
+              </a:rPr>
+              <a:t>The Golden Prompt Formula</a:t>
+            </a:r>
+            <a:endParaRPr lang="en-US" sz="2800" dirty="0">
+              <a:solidFill>
+                <a:schemeClr val="accent6">
+                  <a:lumMod val="60000"/>
+                  <a:lumOff val="40000"/>
+                </a:schemeClr>
+              </a:solidFill>
+            </a:endParaRPr>
+          </a:p>
+        </p:txBody>
+      </p:sp>
+      <p:sp>
+        <p:nvSpPr>
+          <p:cNvPr id="6" name="TextBox 5">
+            <a:extLst>
+              <a:ext uri="{FF2B5EF4-FFF2-40B4-BE49-F238E27FC236}">
+                <a16:creationId xmlns:a16="http://schemas.microsoft.com/office/drawing/2014/main" id="{932F6A72-B2F4-C9D3-C352-AF37A5A9C3E2}"/>
+              </a:ext>
+            </a:extLst>
+          </p:cNvPr>
+          <p:cNvSpPr txBox="1"/>
+          <p:nvPr/>
+        </p:nvSpPr>
+        <p:spPr>
+          <a:xfrm>
+            <a:off x="522487" y="985427"/>
+            <a:ext cx="9358932" cy="1200329"/>
+          </a:xfrm>
+          <a:prstGeom prst="rect">
+            <a:avLst/>
+          </a:prstGeom>
+          <a:noFill/>
+        </p:spPr>
+        <p:txBody>
+          <a:bodyPr wrap="square">
+            <a:spAutoFit/>
+          </a:bodyPr>
+          <a:lstStyle/>
+          <a:p>
+            <a:r>
+              <a:rPr lang="en-US" sz="2400" dirty="0">
+                <a:solidFill>
+                  <a:schemeClr val="accent6">
+                    <a:lumMod val="60000"/>
+                    <a:lumOff val="40000"/>
+                  </a:schemeClr>
+                </a:solidFill>
+              </a:rPr>
+              <a:t>Example: </a:t>
+            </a:r>
+          </a:p>
+          <a:p>
+            <a:r>
+              <a:rPr lang="en-US" sz="2400" dirty="0">
+                <a:solidFill>
+                  <a:schemeClr val="accent6">
+                    <a:lumMod val="60000"/>
+                    <a:lumOff val="40000"/>
+                  </a:schemeClr>
+                </a:solidFill>
+              </a:rPr>
+              <a:t>Tell me the 3 difference between regular data and time series data. Provide output in </a:t>
+            </a:r>
+            <a:r>
+              <a:rPr lang="en-US" sz="2400" b="1" i="1" dirty="0">
+                <a:solidFill>
+                  <a:schemeClr val="accent6">
+                    <a:lumMod val="60000"/>
+                    <a:lumOff val="40000"/>
+                  </a:schemeClr>
+                </a:solidFill>
+              </a:rPr>
+              <a:t>bullet format</a:t>
+            </a:r>
+            <a:r>
+              <a:rPr lang="en-US" sz="2400" dirty="0">
+                <a:solidFill>
+                  <a:schemeClr val="accent6">
+                    <a:lumMod val="60000"/>
+                    <a:lumOff val="40000"/>
+                  </a:schemeClr>
+                </a:solidFill>
+              </a:rPr>
+              <a:t>.</a:t>
+            </a:r>
+          </a:p>
+        </p:txBody>
+      </p:sp>
+      <p:pic>
+        <p:nvPicPr>
+          <p:cNvPr id="3" name="Picture 2">
+            <a:extLst>
+              <a:ext uri="{FF2B5EF4-FFF2-40B4-BE49-F238E27FC236}">
+                <a16:creationId xmlns:a16="http://schemas.microsoft.com/office/drawing/2014/main" id="{1A390310-7D1E-9F76-1D77-780F01CAFEDB}"/>
+              </a:ext>
+            </a:extLst>
+          </p:cNvPr>
+          <p:cNvPicPr>
+            <a:picLocks noChangeAspect="1"/>
+          </p:cNvPicPr>
+          <p:nvPr/>
+        </p:nvPicPr>
+        <p:blipFill>
+          <a:blip r:embed="rId3"/>
+          <a:stretch>
+            <a:fillRect/>
+          </a:stretch>
+        </p:blipFill>
+        <p:spPr>
+          <a:xfrm>
+            <a:off x="1318149" y="3289745"/>
+            <a:ext cx="8284794" cy="2764999"/>
+          </a:xfrm>
+          <a:prstGeom prst="rect">
+            <a:avLst/>
+          </a:prstGeom>
+        </p:spPr>
+      </p:pic>
+    </p:spTree>
+    <p:extLst>
+      <p:ext uri="{BB962C8B-B14F-4D97-AF65-F5344CB8AC3E}">
+        <p14:creationId xmlns:p14="http://schemas.microsoft.com/office/powerpoint/2010/main" val="501153417"/>
+      </p:ext>
+    </p:extLst>
+  </p:cSld>
+  <p:clrMapOvr>
+    <a:masterClrMapping/>
+  </p:clrMapOvr>
+</p:sld>
+</file>
+
+<file path=ppt/slides/slide26.xml><?xml version="1.0" encoding="utf-8"?>
 <p:sld xmlns:a="http://schemas.openxmlformats.org/drawingml/2006/main" xmlns:r="http://schemas.openxmlformats.org/officeDocument/2006/relationships" xmlns:p="http://schemas.openxmlformats.org/presentationml/2006/main">
   <p:cSld>
     <p:spTree>
@@ -7590,7 +9130,7 @@
         </p:blipFill>
         <p:spPr>
           <a:xfrm>
-            <a:off x="2807208" y="1473091"/>
+            <a:off x="2894753" y="1803514"/>
             <a:ext cx="7556938" cy="4863112"/>
           </a:xfrm>
           <a:prstGeom prst="rect">
@@ -7611,7 +9151,7 @@
 </p:sld>
 </file>
 
-<file path=ppt/slides/slide24.xml><?xml version="1.0" encoding="utf-8"?>
+<file path=ppt/slides/slide27.xml><?xml version="1.0" encoding="utf-8"?>
 <p:sld xmlns:a="http://schemas.openxmlformats.org/drawingml/2006/main" xmlns:r="http://schemas.openxmlformats.org/officeDocument/2006/relationships" xmlns:p="http://schemas.openxmlformats.org/presentationml/2006/main">
   <p:cSld>
     <p:spTree>
@@ -7882,7 +9422,7 @@
 </p:sld>
 </file>
 
-<file path=ppt/slides/slide25.xml><?xml version="1.0" encoding="utf-8"?>
+<file path=ppt/slides/slide28.xml><?xml version="1.0" encoding="utf-8"?>
 <p:sld xmlns:a="http://schemas.openxmlformats.org/drawingml/2006/main" xmlns:r="http://schemas.openxmlformats.org/officeDocument/2006/relationships" xmlns:p="http://schemas.openxmlformats.org/presentationml/2006/main">
   <p:cSld>
     <p:spTree>
@@ -7955,27 +9495,8 @@
                   </a:schemeClr>
                 </a:solidFill>
               </a:rPr>
-              <a:t>You are </a:t>
-            </a:r>
-            <a:r>
-              <a:rPr lang="en-US" sz="2400" b="1">
-                <a:solidFill>
-                  <a:schemeClr val="accent6">
-                    <a:lumMod val="60000"/>
-                    <a:lumOff val="40000"/>
-                  </a:schemeClr>
-                </a:solidFill>
-              </a:rPr>
-              <a:t>a ___</a:t>
-            </a:r>
-            <a:endParaRPr lang="en-US" sz="2400" b="1" dirty="0">
-              <a:solidFill>
-                <a:schemeClr val="accent6">
-                  <a:lumMod val="60000"/>
-                  <a:lumOff val="40000"/>
-                </a:schemeClr>
-              </a:solidFill>
-            </a:endParaRPr>
+              <a:t>You are a ___</a:t>
+            </a:r>
           </a:p>
           <a:p>
             <a:endParaRPr lang="en-US" sz="2400" b="1" dirty="0">
@@ -8213,7 +9734,7 @@
 </p:sld>
 </file>
 
-<file path=ppt/slides/slide26.xml><?xml version="1.0" encoding="utf-8"?>
+<file path=ppt/slides/slide29.xml><?xml version="1.0" encoding="utf-8"?>
 <p:sld xmlns:a="http://schemas.openxmlformats.org/drawingml/2006/main" xmlns:r="http://schemas.openxmlformats.org/officeDocument/2006/relationships" xmlns:p="http://schemas.openxmlformats.org/presentationml/2006/main">
   <p:cSld>
     <p:spTree>
@@ -8249,193 +9770,6 @@
 </p:sld>
 </file>
 
-<file path=ppt/slides/slide27.xml><?xml version="1.0" encoding="utf-8"?>
-<p:sld xmlns:a="http://schemas.openxmlformats.org/drawingml/2006/main" xmlns:r="http://schemas.openxmlformats.org/officeDocument/2006/relationships" xmlns:p="http://schemas.openxmlformats.org/presentationml/2006/main">
-  <p:cSld>
-    <p:spTree>
-      <p:nvGrpSpPr>
-        <p:cNvPr id="1" name="">
-          <a:extLst>
-            <a:ext uri="{FF2B5EF4-FFF2-40B4-BE49-F238E27FC236}">
-              <a16:creationId xmlns:a16="http://schemas.microsoft.com/office/drawing/2014/main" id="{4F92E9D7-16AF-61C3-A56D-933DA14F1D5E}"/>
-            </a:ext>
-          </a:extLst>
-        </p:cNvPr>
-        <p:cNvGrpSpPr/>
-        <p:nvPr/>
-      </p:nvGrpSpPr>
-      <p:grpSpPr>
-        <a:xfrm>
-          <a:off x="0" y="0"/>
-          <a:ext cx="0" cy="0"/>
-          <a:chOff x="0" y="0"/>
-          <a:chExt cx="0" cy="0"/>
-        </a:xfrm>
-      </p:grpSpPr>
-      <p:sp>
-        <p:nvSpPr>
-          <p:cNvPr id="9" name="TextBox 8">
-            <a:extLst>
-              <a:ext uri="{FF2B5EF4-FFF2-40B4-BE49-F238E27FC236}">
-                <a16:creationId xmlns:a16="http://schemas.microsoft.com/office/drawing/2014/main" id="{5997DE48-6EA1-1DA7-C6A0-000AD358FC46}"/>
-              </a:ext>
-            </a:extLst>
-          </p:cNvPr>
-          <p:cNvSpPr txBox="1"/>
-          <p:nvPr/>
-        </p:nvSpPr>
-        <p:spPr>
-          <a:xfrm>
-            <a:off x="238125" y="1244739"/>
-            <a:ext cx="9859604" cy="3416320"/>
-          </a:xfrm>
-          <a:prstGeom prst="rect">
-            <a:avLst/>
-          </a:prstGeom>
-          <a:noFill/>
-        </p:spPr>
-        <p:txBody>
-          <a:bodyPr wrap="square" rtlCol="0">
-            <a:spAutoFit/>
-          </a:bodyPr>
-          <a:lstStyle/>
-          <a:p>
-            <a:r>
-              <a:rPr lang="en-US" sz="2400" b="1" dirty="0">
-                <a:solidFill>
-                  <a:schemeClr val="accent6">
-                    <a:lumMod val="60000"/>
-                    <a:lumOff val="40000"/>
-                  </a:schemeClr>
-                </a:solidFill>
-              </a:rPr>
-              <a:t>Practical Demo Idea</a:t>
-            </a:r>
-          </a:p>
-          <a:p>
-            <a:endParaRPr lang="en-US" sz="2400" b="1" dirty="0">
-              <a:solidFill>
-                <a:schemeClr val="accent6">
-                  <a:lumMod val="60000"/>
-                  <a:lumOff val="40000"/>
-                </a:schemeClr>
-              </a:solidFill>
-            </a:endParaRPr>
-          </a:p>
-          <a:p>
-            <a:r>
-              <a:rPr lang="en-US" sz="2400" dirty="0">
-                <a:solidFill>
-                  <a:schemeClr val="accent6">
-                    <a:lumMod val="60000"/>
-                    <a:lumOff val="40000"/>
-                  </a:schemeClr>
-                </a:solidFill>
-              </a:rPr>
-              <a:t>Ask students:</a:t>
-            </a:r>
-          </a:p>
-          <a:p>
-            <a:r>
-              <a:rPr lang="en-US" sz="2400" dirty="0">
-                <a:solidFill>
-                  <a:schemeClr val="accent6">
-                    <a:lumMod val="60000"/>
-                    <a:lumOff val="40000"/>
-                  </a:schemeClr>
-                </a:solidFill>
-              </a:rPr>
-              <a:t>Count tokens in:</a:t>
-            </a:r>
-          </a:p>
-          <a:p>
-            <a:r>
-              <a:rPr lang="en-US" sz="2400" dirty="0">
-                <a:solidFill>
-                  <a:schemeClr val="accent6">
-                    <a:lumMod val="60000"/>
-                    <a:lumOff val="40000"/>
-                  </a:schemeClr>
-                </a:solidFill>
-              </a:rPr>
-              <a:t>"Machine learning is powerful.“</a:t>
-            </a:r>
-          </a:p>
-          <a:p>
-            <a:endParaRPr lang="en-US" sz="2400" dirty="0">
-              <a:solidFill>
-                <a:schemeClr val="accent6">
-                  <a:lumMod val="60000"/>
-                  <a:lumOff val="40000"/>
-                </a:schemeClr>
-              </a:solidFill>
-            </a:endParaRPr>
-          </a:p>
-          <a:p>
-            <a:r>
-              <a:rPr lang="en-US" sz="2400" dirty="0">
-                <a:solidFill>
-                  <a:schemeClr val="accent6">
-                    <a:lumMod val="60000"/>
-                    <a:lumOff val="40000"/>
-                  </a:schemeClr>
-                </a:solidFill>
-              </a:rPr>
-              <a:t>Then show them using tokenizer tools like:</a:t>
-            </a:r>
-          </a:p>
-          <a:p>
-            <a:r>
-              <a:rPr lang="en-US" sz="2400" dirty="0">
-                <a:solidFill>
-                  <a:schemeClr val="accent6">
-                    <a:lumMod val="60000"/>
-                    <a:lumOff val="40000"/>
-                  </a:schemeClr>
-                </a:solidFill>
-              </a:rPr>
-              <a:t>OpenAI tokenizer</a:t>
-            </a:r>
-          </a:p>
-          <a:p>
-            <a:r>
-              <a:rPr lang="en-US" sz="2400" dirty="0" err="1">
-                <a:solidFill>
-                  <a:schemeClr val="accent6">
-                    <a:lumMod val="60000"/>
-                    <a:lumOff val="40000"/>
-                  </a:schemeClr>
-                </a:solidFill>
-              </a:rPr>
-              <a:t>HuggingFace</a:t>
-            </a:r>
-            <a:r>
-              <a:rPr lang="en-US" sz="2400" dirty="0">
-                <a:solidFill>
-                  <a:schemeClr val="accent6">
-                    <a:lumMod val="60000"/>
-                    <a:lumOff val="40000"/>
-                  </a:schemeClr>
-                </a:solidFill>
-              </a:rPr>
-              <a:t> tokenizer</a:t>
-            </a:r>
-          </a:p>
-        </p:txBody>
-      </p:sp>
-    </p:spTree>
-    <p:extLst>
-      <p:ext uri="{BB962C8B-B14F-4D97-AF65-F5344CB8AC3E}">
-        <p14:creationId xmlns:p14="http://schemas.microsoft.com/office/powerpoint/2010/main" val="1911654944"/>
-      </p:ext>
-    </p:extLst>
-  </p:cSld>
-  <p:clrMapOvr>
-    <a:masterClrMapping/>
-  </p:clrMapOvr>
-</p:sld>
-</file>
-
 <file path=ppt/slides/slide3.xml><?xml version="1.0" encoding="utf-8"?>
 <p:sld xmlns:a="http://schemas.openxmlformats.org/drawingml/2006/main" xmlns:r="http://schemas.openxmlformats.org/officeDocument/2006/relationships" xmlns:p="http://schemas.openxmlformats.org/presentationml/2006/main">
   <p:cSld>
@@ -8474,7 +9808,7 @@
         <p:spPr>
           <a:xfrm>
             <a:off x="693168" y="920969"/>
-            <a:ext cx="10427115" cy="3416320"/>
+            <a:ext cx="10427115" cy="3785652"/>
           </a:xfrm>
           <a:prstGeom prst="rect">
             <a:avLst/>
@@ -8521,6 +9855,8 @@
               </a:rPr>
               <a:t>Tokenization = Breaking text into smaller units (tokens).</a:t>
             </a:r>
+          </a:p>
+          <a:p>
             <a:endParaRPr lang="en-US" sz="2400" dirty="0">
               <a:solidFill>
                 <a:schemeClr val="accent6">
@@ -8557,7 +9893,7 @@
                   </a:schemeClr>
                 </a:solidFill>
               </a:rPr>
-              <a:t>Words</a:t>
+              <a:t>Words – happy, fish</a:t>
             </a:r>
           </a:p>
           <a:p>
@@ -8574,7 +9910,7 @@
                   </a:schemeClr>
                 </a:solidFill>
               </a:rPr>
-              <a:t>Parts of words</a:t>
+              <a:t>Parts of words – ungodly (un + godly)</a:t>
             </a:r>
           </a:p>
           <a:p>
@@ -8591,7 +9927,7 @@
                   </a:schemeClr>
                 </a:solidFill>
               </a:rPr>
-              <a:t>Characters</a:t>
+              <a:t>Characters – a </a:t>
             </a:r>
           </a:p>
           <a:p>
@@ -8608,7 +9944,7 @@
                   </a:schemeClr>
                 </a:solidFill>
               </a:rPr>
-              <a:t>Symbols</a:t>
+              <a:t>Symbols – smiling emoji</a:t>
             </a:r>
           </a:p>
           <a:p>
@@ -8625,7 +9961,18 @@
                   </a:schemeClr>
                 </a:solidFill>
               </a:rPr>
-              <a:t>Punctuation</a:t>
+              <a:t>Punctuation – what </a:t>
+            </a:r>
+            <a:r>
+              <a:rPr lang="en-US" sz="2400" b="1" dirty="0">
+                <a:solidFill>
+                  <a:schemeClr val="accent6">
+                    <a:lumMod val="60000"/>
+                    <a:lumOff val="40000"/>
+                  </a:schemeClr>
+                </a:solidFill>
+              </a:rPr>
+              <a:t>!</a:t>
             </a:r>
           </a:p>
         </p:txBody>
@@ -8634,6 +9981,193 @@
     <p:extLst>
       <p:ext uri="{BB962C8B-B14F-4D97-AF65-F5344CB8AC3E}">
         <p14:creationId xmlns:p14="http://schemas.microsoft.com/office/powerpoint/2010/main" val="1409961147"/>
+      </p:ext>
+    </p:extLst>
+  </p:cSld>
+  <p:clrMapOvr>
+    <a:masterClrMapping/>
+  </p:clrMapOvr>
+</p:sld>
+</file>
+
+<file path=ppt/slides/slide30.xml><?xml version="1.0" encoding="utf-8"?>
+<p:sld xmlns:a="http://schemas.openxmlformats.org/drawingml/2006/main" xmlns:r="http://schemas.openxmlformats.org/officeDocument/2006/relationships" xmlns:p="http://schemas.openxmlformats.org/presentationml/2006/main">
+  <p:cSld>
+    <p:spTree>
+      <p:nvGrpSpPr>
+        <p:cNvPr id="1" name="">
+          <a:extLst>
+            <a:ext uri="{FF2B5EF4-FFF2-40B4-BE49-F238E27FC236}">
+              <a16:creationId xmlns:a16="http://schemas.microsoft.com/office/drawing/2014/main" id="{4F92E9D7-16AF-61C3-A56D-933DA14F1D5E}"/>
+            </a:ext>
+          </a:extLst>
+        </p:cNvPr>
+        <p:cNvGrpSpPr/>
+        <p:nvPr/>
+      </p:nvGrpSpPr>
+      <p:grpSpPr>
+        <a:xfrm>
+          <a:off x="0" y="0"/>
+          <a:ext cx="0" cy="0"/>
+          <a:chOff x="0" y="0"/>
+          <a:chExt cx="0" cy="0"/>
+        </a:xfrm>
+      </p:grpSpPr>
+      <p:sp>
+        <p:nvSpPr>
+          <p:cNvPr id="9" name="TextBox 8">
+            <a:extLst>
+              <a:ext uri="{FF2B5EF4-FFF2-40B4-BE49-F238E27FC236}">
+                <a16:creationId xmlns:a16="http://schemas.microsoft.com/office/drawing/2014/main" id="{5997DE48-6EA1-1DA7-C6A0-000AD358FC46}"/>
+              </a:ext>
+            </a:extLst>
+          </p:cNvPr>
+          <p:cNvSpPr txBox="1"/>
+          <p:nvPr/>
+        </p:nvSpPr>
+        <p:spPr>
+          <a:xfrm>
+            <a:off x="238125" y="1244739"/>
+            <a:ext cx="9859604" cy="3416320"/>
+          </a:xfrm>
+          <a:prstGeom prst="rect">
+            <a:avLst/>
+          </a:prstGeom>
+          <a:noFill/>
+        </p:spPr>
+        <p:txBody>
+          <a:bodyPr wrap="square" rtlCol="0">
+            <a:spAutoFit/>
+          </a:bodyPr>
+          <a:lstStyle/>
+          <a:p>
+            <a:r>
+              <a:rPr lang="en-US" sz="2400" b="1" dirty="0">
+                <a:solidFill>
+                  <a:schemeClr val="accent6">
+                    <a:lumMod val="60000"/>
+                    <a:lumOff val="40000"/>
+                  </a:schemeClr>
+                </a:solidFill>
+              </a:rPr>
+              <a:t>Practical Demo Idea</a:t>
+            </a:r>
+          </a:p>
+          <a:p>
+            <a:endParaRPr lang="en-US" sz="2400" b="1" dirty="0">
+              <a:solidFill>
+                <a:schemeClr val="accent6">
+                  <a:lumMod val="60000"/>
+                  <a:lumOff val="40000"/>
+                </a:schemeClr>
+              </a:solidFill>
+            </a:endParaRPr>
+          </a:p>
+          <a:p>
+            <a:r>
+              <a:rPr lang="en-US" sz="2400" dirty="0">
+                <a:solidFill>
+                  <a:schemeClr val="accent6">
+                    <a:lumMod val="60000"/>
+                    <a:lumOff val="40000"/>
+                  </a:schemeClr>
+                </a:solidFill>
+              </a:rPr>
+              <a:t>Ask students:</a:t>
+            </a:r>
+          </a:p>
+          <a:p>
+            <a:r>
+              <a:rPr lang="en-US" sz="2400" dirty="0">
+                <a:solidFill>
+                  <a:schemeClr val="accent6">
+                    <a:lumMod val="60000"/>
+                    <a:lumOff val="40000"/>
+                  </a:schemeClr>
+                </a:solidFill>
+              </a:rPr>
+              <a:t>Count tokens in:</a:t>
+            </a:r>
+          </a:p>
+          <a:p>
+            <a:r>
+              <a:rPr lang="en-US" sz="2400" dirty="0">
+                <a:solidFill>
+                  <a:schemeClr val="accent6">
+                    <a:lumMod val="60000"/>
+                    <a:lumOff val="40000"/>
+                  </a:schemeClr>
+                </a:solidFill>
+              </a:rPr>
+              <a:t>"Machine learning is powerful.“</a:t>
+            </a:r>
+          </a:p>
+          <a:p>
+            <a:endParaRPr lang="en-US" sz="2400" dirty="0">
+              <a:solidFill>
+                <a:schemeClr val="accent6">
+                  <a:lumMod val="60000"/>
+                  <a:lumOff val="40000"/>
+                </a:schemeClr>
+              </a:solidFill>
+            </a:endParaRPr>
+          </a:p>
+          <a:p>
+            <a:r>
+              <a:rPr lang="en-US" sz="2400" dirty="0">
+                <a:solidFill>
+                  <a:schemeClr val="accent6">
+                    <a:lumMod val="60000"/>
+                    <a:lumOff val="40000"/>
+                  </a:schemeClr>
+                </a:solidFill>
+              </a:rPr>
+              <a:t>Then show them using tokenizer tools like:</a:t>
+            </a:r>
+          </a:p>
+          <a:p>
+            <a:r>
+              <a:rPr lang="en-US" sz="2400" dirty="0">
+                <a:solidFill>
+                  <a:schemeClr val="accent6">
+                    <a:lumMod val="60000"/>
+                    <a:lumOff val="40000"/>
+                  </a:schemeClr>
+                </a:solidFill>
+              </a:rPr>
+              <a:t>OpenAI tokenizer</a:t>
+            </a:r>
+          </a:p>
+          <a:p>
+            <a:r>
+              <a:rPr lang="en-US" sz="2400" dirty="0" err="1">
+                <a:solidFill>
+                  <a:schemeClr val="accent6">
+                    <a:lumMod val="60000"/>
+                    <a:lumOff val="40000"/>
+                  </a:schemeClr>
+                </a:solidFill>
+              </a:rPr>
+              <a:t>HuggingFace</a:t>
+            </a:r>
+            <a:r>
+              <a:rPr lang="en-US" sz="2400" dirty="0">
+                <a:solidFill>
+                  <a:schemeClr val="accent6">
+                    <a:lumMod val="60000"/>
+                    <a:lumOff val="40000"/>
+                  </a:schemeClr>
+                </a:solidFill>
+              </a:rPr>
+              <a:t> tokenizer</a:t>
+            </a:r>
+          </a:p>
+        </p:txBody>
+      </p:sp>
+    </p:spTree>
+    <p:extLst>
+      <p:ext uri="{BB962C8B-B14F-4D97-AF65-F5344CB8AC3E}">
+        <p14:creationId xmlns:p14="http://schemas.microsoft.com/office/powerpoint/2010/main" val="1911654944"/>
       </p:ext>
     </p:extLst>
   </p:cSld>
@@ -8680,8 +10214,8 @@
         </p:nvSpPr>
         <p:spPr>
           <a:xfrm>
-            <a:off x="235968" y="171161"/>
-            <a:ext cx="10800840" cy="7048083"/>
+            <a:off x="235967" y="171161"/>
+            <a:ext cx="11611903" cy="6832640"/>
           </a:xfrm>
           <a:prstGeom prst="rect">
             <a:avLst/>
@@ -8775,7 +10309,7 @@
                   </a:schemeClr>
                 </a:solidFill>
               </a:rPr>
-              <a:t>[1012,  45892,    672,         9834,                0]   -</a:t>
+              <a:t>[1012,  45892,    672,         9834,                0]   </a:t>
             </a:r>
             <a:r>
               <a:rPr lang="en-US" sz="2400" dirty="0">
@@ -8787,7 +10321,7 @@
                 </a:solidFill>
                 <a:sym typeface="Wingdings" panose="05000000000000000000" pitchFamily="2" charset="2"/>
               </a:rPr>
-              <a:t> these are </a:t>
+              <a:t> (5 tokens) these are </a:t>
             </a:r>
             <a:r>
               <a:rPr lang="en-US" sz="2400" dirty="0">
@@ -9213,7 +10747,7 @@
         <p:spPr>
           <a:xfrm>
             <a:off x="100965" y="394347"/>
-            <a:ext cx="7168515" cy="5632311"/>
+            <a:ext cx="7168515" cy="5262979"/>
           </a:xfrm>
           <a:prstGeom prst="rect">
             <a:avLst/>
@@ -9435,16 +10969,6 @@
               </a:rPr>
               <a:t>More tokens = More cost</a:t>
             </a:r>
-          </a:p>
-          <a:p>
-            <a:endParaRPr lang="en-US" sz="2400" dirty="0">
-              <a:solidFill>
-                <a:schemeClr val="accent6">
-                  <a:lumMod val="60000"/>
-                  <a:lumOff val="40000"/>
-                </a:schemeClr>
-              </a:solidFill>
-            </a:endParaRPr>
           </a:p>
         </p:txBody>
       </p:sp>
@@ -9565,7 +11089,7 @@
         <p:spPr>
           <a:xfrm>
             <a:off x="292989" y="257187"/>
-            <a:ext cx="9859604" cy="4154984"/>
+            <a:ext cx="9859604" cy="4524315"/>
           </a:xfrm>
           <a:prstGeom prst="rect">
             <a:avLst/>
@@ -9589,6 +11113,16 @@
               </a:rPr>
               <a:t>3) Prompt Clarity</a:t>
             </a:r>
+          </a:p>
+          <a:p>
+            <a:endParaRPr lang="en-US" sz="2400" b="1" dirty="0">
+              <a:solidFill>
+                <a:schemeClr val="accent6">
+                  <a:lumMod val="60000"/>
+                  <a:lumOff val="40000"/>
+                </a:schemeClr>
+              </a:solidFill>
+            </a:endParaRPr>
           </a:p>
           <a:p>
             <a:r>
@@ -9627,6 +11161,10 @@
             </a:r>
           </a:p>
           <a:p>
+            <a:pPr marL="342900" indent="-342900">
+              <a:buFont typeface="Arial" panose="020B0604020202020204" pitchFamily="34" charset="0"/>
+              <a:buChar char="•"/>
+            </a:pPr>
             <a:r>
               <a:rPr lang="en-US" sz="2400" dirty="0">
                 <a:solidFill>
@@ -9640,6 +11178,10 @@
             </a:r>
           </a:p>
           <a:p>
+            <a:pPr marL="342900" indent="-342900">
+              <a:buFont typeface="Arial" panose="020B0604020202020204" pitchFamily="34" charset="0"/>
+              <a:buChar char="•"/>
+            </a:pPr>
             <a:r>
               <a:rPr lang="en-US" sz="2400" dirty="0">
                 <a:solidFill>
@@ -9730,7 +11272,7 @@
                   </a:schemeClr>
                 </a:solidFill>
               </a:rPr>
-              <a:t>In second case: Tokens could be [215, 12, 37, 892]</a:t>
+              <a:t>In second case: Tokens could be [215, 12, 6, 37, 892]</a:t>
             </a:r>
           </a:p>
         </p:txBody>
@@ -10936,4 +12478,299 @@
     </a:ext>
   </a:extLst>
 </a:theme>
+</file>
+
+<file path=ppt/theme/theme3.xml><?xml version="1.0" encoding="utf-8"?>
+<a:theme xmlns:a="http://schemas.openxmlformats.org/drawingml/2006/main" name="Office Theme">
+  <a:themeElements>
+    <a:clrScheme name="Office">
+      <a:dk1>
+        <a:sysClr val="windowText" lastClr="000000"/>
+      </a:dk1>
+      <a:lt1>
+        <a:sysClr val="window" lastClr="FFFFFF"/>
+      </a:lt1>
+      <a:dk2>
+        <a:srgbClr val="44546A"/>
+      </a:dk2>
+      <a:lt2>
+        <a:srgbClr val="E7E6E6"/>
+      </a:lt2>
+      <a:accent1>
+        <a:srgbClr val="4472C4"/>
+      </a:accent1>
+      <a:accent2>
+        <a:srgbClr val="ED7D31"/>
+      </a:accent2>
+      <a:accent3>
+        <a:srgbClr val="A5A5A5"/>
+      </a:accent3>
+      <a:accent4>
+        <a:srgbClr val="FFC000"/>
+      </a:accent4>
+      <a:accent5>
+        <a:srgbClr val="5B9BD5"/>
+      </a:accent5>
+      <a:accent6>
+        <a:srgbClr val="70AD47"/>
+      </a:accent6>
+      <a:hlink>
+        <a:srgbClr val="0563C1"/>
+      </a:hlink>
+      <a:folHlink>
+        <a:srgbClr val="954F72"/>
+      </a:folHlink>
+    </a:clrScheme>
+    <a:fontScheme name="Office">
+      <a:majorFont>
+        <a:latin typeface="Calibri Light" panose="020F0302020204030204"/>
+        <a:ea typeface=""/>
+        <a:cs typeface=""/>
+        <a:font script="Jpan" typeface="游ゴシック Light"/>
+        <a:font script="Hang" typeface="맑은 고딕"/>
+        <a:font script="Hans" typeface="等线 Light"/>
+        <a:font script="Hant" typeface="新細明體"/>
+        <a:font script="Arab" typeface="Times New Roman"/>
+        <a:font script="Hebr" typeface="Times New Roman"/>
+        <a:font script="Thai" typeface="Angsana New"/>
+        <a:font script="Ethi" typeface="Nyala"/>
+        <a:font script="Beng" typeface="Vrinda"/>
+        <a:font script="Gujr" typeface="Shruti"/>
+        <a:font script="Khmr" typeface="MoolBoran"/>
+        <a:font script="Knda" typeface="Tunga"/>
+        <a:font script="Guru" typeface="Raavi"/>
+        <a:font script="Cans" typeface="Euphemia"/>
+        <a:font script="Cher" typeface="Plantagenet Cherokee"/>
+        <a:font script="Yiii" typeface="Microsoft Yi Baiti"/>
+        <a:font script="Tibt" typeface="Microsoft Himalaya"/>
+        <a:font script="Thaa" typeface="MV Boli"/>
+        <a:font script="Deva" typeface="Mangal"/>
+        <a:font script="Telu" typeface="Gautami"/>
+        <a:font script="Taml" typeface="Latha"/>
+        <a:font script="Syrc" typeface="Estrangelo Edessa"/>
+        <a:font script="Orya" typeface="Kalinga"/>
+        <a:font script="Mlym" typeface="Kartika"/>
+        <a:font script="Laoo" typeface="DokChampa"/>
+        <a:font script="Sinh" typeface="Iskoola Pota"/>
+        <a:font script="Mong" typeface="Mongolian Baiti"/>
+        <a:font script="Viet" typeface="Times New Roman"/>
+        <a:font script="Uigh" typeface="Microsoft Uighur"/>
+        <a:font script="Geor" typeface="Sylfaen"/>
+        <a:font script="Armn" typeface="Arial"/>
+        <a:font script="Bugi" typeface="Leelawadee UI"/>
+        <a:font script="Bopo" typeface="Microsoft JhengHei"/>
+        <a:font script="Java" typeface="Javanese Text"/>
+        <a:font script="Lisu" typeface="Segoe UI"/>
+        <a:font script="Mymr" typeface="Myanmar Text"/>
+        <a:font script="Nkoo" typeface="Ebrima"/>
+        <a:font script="Olck" typeface="Nirmala UI"/>
+        <a:font script="Osma" typeface="Ebrima"/>
+        <a:font script="Phag" typeface="Phagspa"/>
+        <a:font script="Syrn" typeface="Estrangelo Edessa"/>
+        <a:font script="Syrj" typeface="Estrangelo Edessa"/>
+        <a:font script="Syre" typeface="Estrangelo Edessa"/>
+        <a:font script="Sora" typeface="Nirmala UI"/>
+        <a:font script="Tale" typeface="Microsoft Tai Le"/>
+        <a:font script="Talu" typeface="Microsoft New Tai Lue"/>
+        <a:font script="Tfng" typeface="Ebrima"/>
+      </a:majorFont>
+      <a:minorFont>
+        <a:latin typeface="Calibri" panose="020F0502020204030204"/>
+        <a:ea typeface=""/>
+        <a:cs typeface=""/>
+        <a:font script="Jpan" typeface="游ゴシック"/>
+        <a:font script="Hang" typeface="맑은 고딕"/>
+        <a:font script="Hans" typeface="等线"/>
+        <a:font script="Hant" typeface="新細明體"/>
+        <a:font script="Arab" typeface="Arial"/>
+        <a:font script="Hebr" typeface="Arial"/>
+        <a:font script="Thai" typeface="Cordia New"/>
+        <a:font script="Ethi" typeface="Nyala"/>
+        <a:font script="Beng" typeface="Vrinda"/>
+        <a:font script="Gujr" typeface="Shruti"/>
+        <a:font script="Khmr" typeface="DaunPenh"/>
+        <a:font script="Knda" typeface="Tunga"/>
+        <a:font script="Guru" typeface="Raavi"/>
+        <a:font script="Cans" typeface="Euphemia"/>
+        <a:font script="Cher" typeface="Plantagenet Cherokee"/>
+        <a:font script="Yiii" typeface="Microsoft Yi Baiti"/>
+        <a:font script="Tibt" typeface="Microsoft Himalaya"/>
+        <a:font script="Thaa" typeface="MV Boli"/>
+        <a:font script="Deva" typeface="Mangal"/>
+        <a:font script="Telu" typeface="Gautami"/>
+        <a:font script="Taml" typeface="Latha"/>
+        <a:font script="Syrc" typeface="Estrangelo Edessa"/>
+        <a:font script="Orya" typeface="Kalinga"/>
+        <a:font script="Mlym" typeface="Kartika"/>
+        <a:font script="Laoo" typeface="DokChampa"/>
+        <a:font script="Sinh" typeface="Iskoola Pota"/>
+        <a:font script="Mong" typeface="Mongolian Baiti"/>
+        <a:font script="Viet" typeface="Arial"/>
+        <a:font script="Uigh" typeface="Microsoft Uighur"/>
+        <a:font script="Geor" typeface="Sylfaen"/>
+        <a:font script="Armn" typeface="Arial"/>
+        <a:font script="Bugi" typeface="Leelawadee UI"/>
+        <a:font script="Bopo" typeface="Microsoft JhengHei"/>
+        <a:font script="Java" typeface="Javanese Text"/>
+        <a:font script="Lisu" typeface="Segoe UI"/>
+        <a:font script="Mymr" typeface="Myanmar Text"/>
+        <a:font script="Nkoo" typeface="Ebrima"/>
+        <a:font script="Olck" typeface="Nirmala UI"/>
+        <a:font script="Osma" typeface="Ebrima"/>
+        <a:font script="Phag" typeface="Phagspa"/>
+        <a:font script="Syrn" typeface="Estrangelo Edessa"/>
+        <a:font script="Syrj" typeface="Estrangelo Edessa"/>
+        <a:font script="Syre" typeface="Estrangelo Edessa"/>
+        <a:font script="Sora" typeface="Nirmala UI"/>
+        <a:font script="Tale" typeface="Microsoft Tai Le"/>
+        <a:font script="Talu" typeface="Microsoft New Tai Lue"/>
+        <a:font script="Tfng" typeface="Ebrima"/>
+      </a:minorFont>
+    </a:fontScheme>
+    <a:fmtScheme name="Office">
+      <a:fillStyleLst>
+        <a:solidFill>
+          <a:schemeClr val="phClr"/>
+        </a:solidFill>
+        <a:gradFill rotWithShape="1">
+          <a:gsLst>
+            <a:gs pos="0">
+              <a:schemeClr val="phClr">
+                <a:lumMod val="110000"/>
+                <a:satMod val="105000"/>
+                <a:tint val="67000"/>
+              </a:schemeClr>
+            </a:gs>
+            <a:gs pos="50000">
+              <a:schemeClr val="phClr">
+                <a:lumMod val="105000"/>
+                <a:satMod val="103000"/>
+                <a:tint val="73000"/>
+              </a:schemeClr>
+            </a:gs>
+            <a:gs pos="100000">
+              <a:schemeClr val="phClr">
+                <a:lumMod val="105000"/>
+                <a:satMod val="109000"/>
+                <a:tint val="81000"/>
+              </a:schemeClr>
+            </a:gs>
+          </a:gsLst>
+          <a:lin ang="5400000" scaled="0"/>
+        </a:gradFill>
+        <a:gradFill rotWithShape="1">
+          <a:gsLst>
+            <a:gs pos="0">
+              <a:schemeClr val="phClr">
+                <a:satMod val="103000"/>
+                <a:lumMod val="102000"/>
+                <a:tint val="94000"/>
+              </a:schemeClr>
+            </a:gs>
+            <a:gs pos="50000">
+              <a:schemeClr val="phClr">
+                <a:satMod val="110000"/>
+                <a:lumMod val="100000"/>
+                <a:shade val="100000"/>
+              </a:schemeClr>
+            </a:gs>
+            <a:gs pos="100000">
+              <a:schemeClr val="phClr">
+                <a:lumMod val="99000"/>
+                <a:satMod val="120000"/>
+                <a:shade val="78000"/>
+              </a:schemeClr>
+            </a:gs>
+          </a:gsLst>
+          <a:lin ang="5400000" scaled="0"/>
+        </a:gradFill>
+      </a:fillStyleLst>
+      <a:lnStyleLst>
+        <a:ln w="6350" cap="flat" cmpd="sng" algn="ctr">
+          <a:solidFill>
+            <a:schemeClr val="phClr"/>
+          </a:solidFill>
+          <a:prstDash val="solid"/>
+          <a:miter lim="800000"/>
+        </a:ln>
+        <a:ln w="12700" cap="flat" cmpd="sng" algn="ctr">
+          <a:solidFill>
+            <a:schemeClr val="phClr"/>
+          </a:solidFill>
+          <a:prstDash val="solid"/>
+          <a:miter lim="800000"/>
+        </a:ln>
+        <a:ln w="19050" cap="flat" cmpd="sng" algn="ctr">
+          <a:solidFill>
+            <a:schemeClr val="phClr"/>
+          </a:solidFill>
+          <a:prstDash val="solid"/>
+          <a:miter lim="800000"/>
+        </a:ln>
+      </a:lnStyleLst>
+      <a:effectStyleLst>
+        <a:effectStyle>
+          <a:effectLst/>
+        </a:effectStyle>
+        <a:effectStyle>
+          <a:effectLst/>
+        </a:effectStyle>
+        <a:effectStyle>
+          <a:effectLst>
+            <a:outerShdw blurRad="57150" dist="19050" dir="5400000" algn="ctr" rotWithShape="0">
+              <a:srgbClr val="000000">
+                <a:alpha val="63000"/>
+              </a:srgbClr>
+            </a:outerShdw>
+          </a:effectLst>
+        </a:effectStyle>
+      </a:effectStyleLst>
+      <a:bgFillStyleLst>
+        <a:solidFill>
+          <a:schemeClr val="phClr"/>
+        </a:solidFill>
+        <a:solidFill>
+          <a:schemeClr val="phClr">
+            <a:tint val="95000"/>
+            <a:satMod val="170000"/>
+          </a:schemeClr>
+        </a:solidFill>
+        <a:gradFill rotWithShape="1">
+          <a:gsLst>
+            <a:gs pos="0">
+              <a:schemeClr val="phClr">
+                <a:tint val="93000"/>
+                <a:satMod val="150000"/>
+                <a:shade val="98000"/>
+                <a:lumMod val="102000"/>
+              </a:schemeClr>
+            </a:gs>
+            <a:gs pos="50000">
+              <a:schemeClr val="phClr">
+                <a:tint val="98000"/>
+                <a:satMod val="130000"/>
+                <a:shade val="90000"/>
+                <a:lumMod val="103000"/>
+              </a:schemeClr>
+            </a:gs>
+            <a:gs pos="100000">
+              <a:schemeClr val="phClr">
+                <a:shade val="63000"/>
+                <a:satMod val="120000"/>
+              </a:schemeClr>
+            </a:gs>
+          </a:gsLst>
+          <a:lin ang="5400000" scaled="0"/>
+        </a:gradFill>
+      </a:bgFillStyleLst>
+    </a:fmtScheme>
+  </a:themeElements>
+  <a:objectDefaults/>
+  <a:extraClrSchemeLst/>
+  <a:extLst>
+    <a:ext uri="{05A4C25C-085E-4340-85A3-A5531E510DB2}">
+      <thm15:themeFamily xmlns:thm15="http://schemas.microsoft.com/office/thememl/2012/main" name="Office Theme" id="{62F939B6-93AF-4DB8-9C6B-D6C7DFDC589F}" vid="{4A3C46E8-61CC-4603-A589-7422A47A8E4A}"/>
+    </a:ext>
+  </a:extLst>
+</a:theme>
 </file>